--- a/customer churn.pptx
+++ b/customer churn.pptx
@@ -117,15 +117,12 @@
       </a:defRPr>
     </a:lvl9pPr>
   </p:defaultTextStyle>
+  <p:extLst>
+    <p:ext uri="{EFAFB233-063F-42B5-8137-9DF3F51BA10A}">
+      <p15:sldGuideLst xmlns:p15="http://schemas.microsoft.com/office/powerpoint/2012/main"/>
+    </p:ext>
+  </p:extLst>
 </p:presentation>
-</file>
-
-<file path=ppt/revisionInfo.xml><?xml version="1.0" encoding="utf-8"?>
-<p1510:revInfo xmlns:a="http://schemas.openxmlformats.org/drawingml/2006/main" xmlns:r="http://schemas.openxmlformats.org/officeDocument/2006/relationships" xmlns:p1510="http://schemas.microsoft.com/office/powerpoint/2015/10/main">
-  <p1510:revLst>
-    <p1510:client id="{6AE72E18-5777-4026-B717-CD69332179EB}" v="6" dt="2026-05-11T22:41:02.024"/>
-  </p1510:revLst>
-</p1510:revInfo>
 </file>
 
 <file path=ppt/changesInfos/changesInfo1.xml><?xml version="1.0" encoding="utf-8"?>
@@ -133,1392 +130,40 @@
   <pc:docChgLst>
     <pc:chgData name="kulwinder bhamra" userId="a12914428fb3a095" providerId="LiveId" clId="{F9C495C9-0E7D-43E7-AD41-513FD928BDD5}"/>
     <pc:docChg chg="undo custSel mod addSld delSld modSld addMainMaster delMainMaster modMainMaster modNotesMaster setSldSz">
-      <pc:chgData name="kulwinder bhamra" userId="a12914428fb3a095" providerId="LiveId" clId="{F9C495C9-0E7D-43E7-AD41-513FD928BDD5}" dt="2026-05-11T23:23:53.964" v="80" actId="26606"/>
+      <pc:chgData name="kulwinder bhamra" userId="a12914428fb3a095" providerId="LiveId" clId="{F9C495C9-0E7D-43E7-AD41-513FD928BDD5}" dt="2026-07-21T21:10:39.181" v="83" actId="26606"/>
       <pc:docMkLst>
         <pc:docMk/>
       </pc:docMkLst>
-      <pc:sldChg chg="addSp modSp add mod modNotes">
-        <pc:chgData name="kulwinder bhamra" userId="a12914428fb3a095" providerId="LiveId" clId="{F9C495C9-0E7D-43E7-AD41-513FD928BDD5}" dt="2026-05-11T23:23:53.964" v="80" actId="26606"/>
-        <pc:sldMkLst>
-          <pc:docMk/>
-          <pc:sldMk cId="0" sldId="256"/>
-        </pc:sldMkLst>
-        <pc:spChg chg="mod">
-          <ac:chgData name="kulwinder bhamra" userId="a12914428fb3a095" providerId="LiveId" clId="{F9C495C9-0E7D-43E7-AD41-513FD928BDD5}" dt="2026-05-11T23:04:53.836" v="77" actId="26606"/>
-          <ac:spMkLst>
-            <pc:docMk/>
-            <pc:sldMk cId="0" sldId="256"/>
-            <ac:spMk id="6" creationId="{00000000-0000-0000-0000-000000000000}"/>
-          </ac:spMkLst>
-        </pc:spChg>
-        <pc:spChg chg="add">
-          <ac:chgData name="kulwinder bhamra" userId="a12914428fb3a095" providerId="LiveId" clId="{F9C495C9-0E7D-43E7-AD41-513FD928BDD5}" dt="2026-05-11T23:23:53.964" v="80" actId="26606"/>
-          <ac:spMkLst>
-            <pc:docMk/>
-            <pc:sldMk cId="0" sldId="256"/>
-            <ac:spMk id="7" creationId="{00000000-0000-0000-0000-000000000000}"/>
-          </ac:spMkLst>
-        </pc:spChg>
-      </pc:sldChg>
-      <pc:sldChg chg="modSp del mod">
-        <pc:chgData name="kulwinder bhamra" userId="a12914428fb3a095" providerId="LiveId" clId="{F9C495C9-0E7D-43E7-AD41-513FD928BDD5}" dt="2026-05-11T22:40:53.464" v="68" actId="47"/>
-        <pc:sldMkLst>
-          <pc:docMk/>
-          <pc:sldMk cId="4168778448" sldId="256"/>
-        </pc:sldMkLst>
-        <pc:spChg chg="mod">
-          <ac:chgData name="kulwinder bhamra" userId="a12914428fb3a095" providerId="LiveId" clId="{F9C495C9-0E7D-43E7-AD41-513FD928BDD5}" dt="2026-05-11T22:34:35.101" v="24" actId="14100"/>
-          <ac:spMkLst>
-            <pc:docMk/>
-            <pc:sldMk cId="4168778448" sldId="256"/>
-            <ac:spMk id="2" creationId="{A706EA1D-78A7-C602-06FA-007845FF0644}"/>
-          </ac:spMkLst>
-        </pc:spChg>
-        <pc:spChg chg="mod">
-          <ac:chgData name="kulwinder bhamra" userId="a12914428fb3a095" providerId="LiveId" clId="{F9C495C9-0E7D-43E7-AD41-513FD928BDD5}" dt="2026-05-11T22:40:51.748" v="67" actId="27636"/>
-          <ac:spMkLst>
-            <pc:docMk/>
-            <pc:sldMk cId="4168778448" sldId="256"/>
-            <ac:spMk id="3" creationId="{9ED62828-7850-01EB-0381-E757F77982CB}"/>
-          </ac:spMkLst>
-        </pc:spChg>
-      </pc:sldChg>
-      <pc:sldChg chg="modSp add mod modNotes">
-        <pc:chgData name="kulwinder bhamra" userId="a12914428fb3a095" providerId="LiveId" clId="{F9C495C9-0E7D-43E7-AD41-513FD928BDD5}" dt="2026-05-11T23:19:50.983" v="79" actId="26606"/>
-        <pc:sldMkLst>
-          <pc:docMk/>
-          <pc:sldMk cId="0" sldId="257"/>
-        </pc:sldMkLst>
-        <pc:spChg chg="mod">
-          <ac:chgData name="kulwinder bhamra" userId="a12914428fb3a095" providerId="LiveId" clId="{F9C495C9-0E7D-43E7-AD41-513FD928BDD5}" dt="2026-05-11T23:04:53.836" v="77" actId="26606"/>
-          <ac:spMkLst>
-            <pc:docMk/>
-            <pc:sldMk cId="0" sldId="257"/>
-            <ac:spMk id="6" creationId="{00000000-0000-0000-0000-000000000000}"/>
-          </ac:spMkLst>
-        </pc:spChg>
-        <pc:spChg chg="mod">
-          <ac:chgData name="kulwinder bhamra" userId="a12914428fb3a095" providerId="LiveId" clId="{F9C495C9-0E7D-43E7-AD41-513FD928BDD5}" dt="2026-05-11T23:19:50.983" v="79" actId="26606"/>
-          <ac:spMkLst>
-            <pc:docMk/>
-            <pc:sldMk cId="0" sldId="257"/>
-            <ac:spMk id="10" creationId="{00000000-0000-0000-0000-000000000000}"/>
-          </ac:spMkLst>
-        </pc:spChg>
-        <pc:spChg chg="mod">
-          <ac:chgData name="kulwinder bhamra" userId="a12914428fb3a095" providerId="LiveId" clId="{F9C495C9-0E7D-43E7-AD41-513FD928BDD5}" dt="2026-05-11T23:19:50.983" v="79" actId="26606"/>
-          <ac:spMkLst>
-            <pc:docMk/>
-            <pc:sldMk cId="0" sldId="257"/>
-            <ac:spMk id="13" creationId="{00000000-0000-0000-0000-000000000000}"/>
-          </ac:spMkLst>
-        </pc:spChg>
-        <pc:spChg chg="mod">
-          <ac:chgData name="kulwinder bhamra" userId="a12914428fb3a095" providerId="LiveId" clId="{F9C495C9-0E7D-43E7-AD41-513FD928BDD5}" dt="2026-05-11T23:19:50.983" v="79" actId="26606"/>
-          <ac:spMkLst>
-            <pc:docMk/>
-            <pc:sldMk cId="0" sldId="257"/>
-            <ac:spMk id="14" creationId="{00000000-0000-0000-0000-000000000000}"/>
-          </ac:spMkLst>
-        </pc:spChg>
-        <pc:spChg chg="mod">
-          <ac:chgData name="kulwinder bhamra" userId="a12914428fb3a095" providerId="LiveId" clId="{F9C495C9-0E7D-43E7-AD41-513FD928BDD5}" dt="2026-05-11T23:04:53.836" v="77" actId="26606"/>
-          <ac:spMkLst>
-            <pc:docMk/>
-            <pc:sldMk cId="0" sldId="257"/>
-            <ac:spMk id="17" creationId="{00000000-0000-0000-0000-000000000000}"/>
-          </ac:spMkLst>
-        </pc:spChg>
-        <pc:spChg chg="mod">
-          <ac:chgData name="kulwinder bhamra" userId="a12914428fb3a095" providerId="LiveId" clId="{F9C495C9-0E7D-43E7-AD41-513FD928BDD5}" dt="2026-05-11T23:04:53.836" v="77" actId="26606"/>
-          <ac:spMkLst>
-            <pc:docMk/>
-            <pc:sldMk cId="0" sldId="257"/>
-            <ac:spMk id="18" creationId="{00000000-0000-0000-0000-000000000000}"/>
-          </ac:spMkLst>
-        </pc:spChg>
-        <pc:spChg chg="mod">
-          <ac:chgData name="kulwinder bhamra" userId="a12914428fb3a095" providerId="LiveId" clId="{F9C495C9-0E7D-43E7-AD41-513FD928BDD5}" dt="2026-05-11T23:04:53.836" v="77" actId="26606"/>
-          <ac:spMkLst>
-            <pc:docMk/>
-            <pc:sldMk cId="0" sldId="257"/>
-            <ac:spMk id="21" creationId="{00000000-0000-0000-0000-000000000000}"/>
-          </ac:spMkLst>
-        </pc:spChg>
-        <pc:spChg chg="mod">
-          <ac:chgData name="kulwinder bhamra" userId="a12914428fb3a095" providerId="LiveId" clId="{F9C495C9-0E7D-43E7-AD41-513FD928BDD5}" dt="2026-05-11T23:04:53.836" v="77" actId="26606"/>
-          <ac:spMkLst>
-            <pc:docMk/>
-            <pc:sldMk cId="0" sldId="257"/>
-            <ac:spMk id="22" creationId="{00000000-0000-0000-0000-000000000000}"/>
-          </ac:spMkLst>
-        </pc:spChg>
-        <pc:picChg chg="mod">
-          <ac:chgData name="kulwinder bhamra" userId="a12914428fb3a095" providerId="LiveId" clId="{F9C495C9-0E7D-43E7-AD41-513FD928BDD5}" dt="2026-05-11T23:19:50.983" v="79" actId="26606"/>
-          <ac:picMkLst>
-            <pc:docMk/>
-            <pc:sldMk cId="0" sldId="257"/>
-            <ac:picMk id="23" creationId="{00000000-0000-0000-0000-000000000000}"/>
-          </ac:picMkLst>
-        </pc:picChg>
-      </pc:sldChg>
-      <pc:sldChg chg="modSp add mod modNotes">
-        <pc:chgData name="kulwinder bhamra" userId="a12914428fb3a095" providerId="LiveId" clId="{F9C495C9-0E7D-43E7-AD41-513FD928BDD5}" dt="2026-05-11T23:19:50.983" v="79" actId="26606"/>
-        <pc:sldMkLst>
-          <pc:docMk/>
-          <pc:sldMk cId="0" sldId="258"/>
-        </pc:sldMkLst>
-        <pc:spChg chg="mod">
-          <ac:chgData name="kulwinder bhamra" userId="a12914428fb3a095" providerId="LiveId" clId="{F9C495C9-0E7D-43E7-AD41-513FD928BDD5}" dt="2026-05-11T23:04:53.836" v="77" actId="26606"/>
-          <ac:spMkLst>
-            <pc:docMk/>
-            <pc:sldMk cId="0" sldId="258"/>
-            <ac:spMk id="3" creationId="{00000000-0000-0000-0000-000000000000}"/>
-          </ac:spMkLst>
-        </pc:spChg>
-        <pc:spChg chg="mod">
-          <ac:chgData name="kulwinder bhamra" userId="a12914428fb3a095" providerId="LiveId" clId="{F9C495C9-0E7D-43E7-AD41-513FD928BDD5}" dt="2026-05-11T23:04:53.836" v="77" actId="26606"/>
-          <ac:spMkLst>
-            <pc:docMk/>
-            <pc:sldMk cId="0" sldId="258"/>
-            <ac:spMk id="6" creationId="{00000000-0000-0000-0000-000000000000}"/>
-          </ac:spMkLst>
-        </pc:spChg>
-        <pc:spChg chg="mod">
-          <ac:chgData name="kulwinder bhamra" userId="a12914428fb3a095" providerId="LiveId" clId="{F9C495C9-0E7D-43E7-AD41-513FD928BDD5}" dt="2026-05-11T23:04:53.836" v="77" actId="26606"/>
-          <ac:spMkLst>
-            <pc:docMk/>
-            <pc:sldMk cId="0" sldId="258"/>
-            <ac:spMk id="7" creationId="{00000000-0000-0000-0000-000000000000}"/>
-          </ac:spMkLst>
-        </pc:spChg>
-        <pc:spChg chg="mod">
-          <ac:chgData name="kulwinder bhamra" userId="a12914428fb3a095" providerId="LiveId" clId="{F9C495C9-0E7D-43E7-AD41-513FD928BDD5}" dt="2026-05-11T23:04:53.836" v="77" actId="26606"/>
-          <ac:spMkLst>
-            <pc:docMk/>
-            <pc:sldMk cId="0" sldId="258"/>
-            <ac:spMk id="10" creationId="{00000000-0000-0000-0000-000000000000}"/>
-          </ac:spMkLst>
-        </pc:spChg>
-        <pc:spChg chg="mod">
-          <ac:chgData name="kulwinder bhamra" userId="a12914428fb3a095" providerId="LiveId" clId="{F9C495C9-0E7D-43E7-AD41-513FD928BDD5}" dt="2026-05-11T23:04:53.836" v="77" actId="26606"/>
-          <ac:spMkLst>
-            <pc:docMk/>
-            <pc:sldMk cId="0" sldId="258"/>
-            <ac:spMk id="11" creationId="{00000000-0000-0000-0000-000000000000}"/>
-          </ac:spMkLst>
-        </pc:spChg>
-        <pc:spChg chg="mod">
-          <ac:chgData name="kulwinder bhamra" userId="a12914428fb3a095" providerId="LiveId" clId="{F9C495C9-0E7D-43E7-AD41-513FD928BDD5}" dt="2026-05-11T23:04:53.836" v="77" actId="26606"/>
-          <ac:spMkLst>
-            <pc:docMk/>
-            <pc:sldMk cId="0" sldId="258"/>
-            <ac:spMk id="14" creationId="{00000000-0000-0000-0000-000000000000}"/>
-          </ac:spMkLst>
-        </pc:spChg>
-        <pc:spChg chg="mod">
-          <ac:chgData name="kulwinder bhamra" userId="a12914428fb3a095" providerId="LiveId" clId="{F9C495C9-0E7D-43E7-AD41-513FD928BDD5}" dt="2026-05-11T23:04:53.836" v="77" actId="26606"/>
-          <ac:spMkLst>
-            <pc:docMk/>
-            <pc:sldMk cId="0" sldId="258"/>
-            <ac:spMk id="15" creationId="{00000000-0000-0000-0000-000000000000}"/>
-          </ac:spMkLst>
-        </pc:spChg>
-      </pc:sldChg>
-      <pc:sldChg chg="addSp delSp modSp add mod setBg modNotes">
-        <pc:chgData name="kulwinder bhamra" userId="a12914428fb3a095" providerId="LiveId" clId="{F9C495C9-0E7D-43E7-AD41-513FD928BDD5}" dt="2026-05-11T23:19:50.983" v="79" actId="26606"/>
-        <pc:sldMkLst>
-          <pc:docMk/>
-          <pc:sldMk cId="0" sldId="259"/>
-        </pc:sldMkLst>
-        <pc:spChg chg="mod">
-          <ac:chgData name="kulwinder bhamra" userId="a12914428fb3a095" providerId="LiveId" clId="{F9C495C9-0E7D-43E7-AD41-513FD928BDD5}" dt="2026-05-11T23:04:53.836" v="77" actId="26606"/>
-          <ac:spMkLst>
-            <pc:docMk/>
-            <pc:sldMk cId="0" sldId="259"/>
-            <ac:spMk id="2" creationId="{00000000-0000-0000-0000-000000000000}"/>
-          </ac:spMkLst>
-        </pc:spChg>
-        <pc:spChg chg="mod">
-          <ac:chgData name="kulwinder bhamra" userId="a12914428fb3a095" providerId="LiveId" clId="{F9C495C9-0E7D-43E7-AD41-513FD928BDD5}" dt="2026-05-11T23:04:53.836" v="77" actId="26606"/>
-          <ac:spMkLst>
-            <pc:docMk/>
-            <pc:sldMk cId="0" sldId="259"/>
-            <ac:spMk id="3" creationId="{00000000-0000-0000-0000-000000000000}"/>
-          </ac:spMkLst>
-        </pc:spChg>
-        <pc:spChg chg="del">
-          <ac:chgData name="kulwinder bhamra" userId="a12914428fb3a095" providerId="LiveId" clId="{F9C495C9-0E7D-43E7-AD41-513FD928BDD5}" dt="2026-05-11T23:04:53.836" v="77" actId="26606"/>
-          <ac:spMkLst>
-            <pc:docMk/>
-            <pc:sldMk cId="0" sldId="259"/>
-            <ac:spMk id="6" creationId="{00000000-0000-0000-0000-000000000000}"/>
-          </ac:spMkLst>
-        </pc:spChg>
-        <pc:spChg chg="del">
-          <ac:chgData name="kulwinder bhamra" userId="a12914428fb3a095" providerId="LiveId" clId="{F9C495C9-0E7D-43E7-AD41-513FD928BDD5}" dt="2026-05-11T23:04:53.836" v="77" actId="26606"/>
-          <ac:spMkLst>
-            <pc:docMk/>
-            <pc:sldMk cId="0" sldId="259"/>
-            <ac:spMk id="7" creationId="{00000000-0000-0000-0000-000000000000}"/>
-          </ac:spMkLst>
-        </pc:spChg>
-        <pc:spChg chg="del">
-          <ac:chgData name="kulwinder bhamra" userId="a12914428fb3a095" providerId="LiveId" clId="{F9C495C9-0E7D-43E7-AD41-513FD928BDD5}" dt="2026-05-11T23:04:53.836" v="77" actId="26606"/>
-          <ac:spMkLst>
-            <pc:docMk/>
-            <pc:sldMk cId="0" sldId="259"/>
-            <ac:spMk id="8" creationId="{00000000-0000-0000-0000-000000000000}"/>
-          </ac:spMkLst>
-        </pc:spChg>
-        <pc:spChg chg="del">
-          <ac:chgData name="kulwinder bhamra" userId="a12914428fb3a095" providerId="LiveId" clId="{F9C495C9-0E7D-43E7-AD41-513FD928BDD5}" dt="2026-05-11T23:04:53.836" v="77" actId="26606"/>
-          <ac:spMkLst>
-            <pc:docMk/>
-            <pc:sldMk cId="0" sldId="259"/>
-            <ac:spMk id="9" creationId="{00000000-0000-0000-0000-000000000000}"/>
-          </ac:spMkLst>
-        </pc:spChg>
-        <pc:spChg chg="del">
-          <ac:chgData name="kulwinder bhamra" userId="a12914428fb3a095" providerId="LiveId" clId="{F9C495C9-0E7D-43E7-AD41-513FD928BDD5}" dt="2026-05-11T23:04:53.836" v="77" actId="26606"/>
-          <ac:spMkLst>
-            <pc:docMk/>
-            <pc:sldMk cId="0" sldId="259"/>
-            <ac:spMk id="10" creationId="{00000000-0000-0000-0000-000000000000}"/>
-          </ac:spMkLst>
-        </pc:spChg>
-        <pc:spChg chg="del">
-          <ac:chgData name="kulwinder bhamra" userId="a12914428fb3a095" providerId="LiveId" clId="{F9C495C9-0E7D-43E7-AD41-513FD928BDD5}" dt="2026-05-11T23:04:53.836" v="77" actId="26606"/>
-          <ac:spMkLst>
-            <pc:docMk/>
-            <pc:sldMk cId="0" sldId="259"/>
-            <ac:spMk id="11" creationId="{00000000-0000-0000-0000-000000000000}"/>
-          </ac:spMkLst>
-        </pc:spChg>
-        <pc:spChg chg="del">
-          <ac:chgData name="kulwinder bhamra" userId="a12914428fb3a095" providerId="LiveId" clId="{F9C495C9-0E7D-43E7-AD41-513FD928BDD5}" dt="2026-05-11T23:04:53.836" v="77" actId="26606"/>
-          <ac:spMkLst>
-            <pc:docMk/>
-            <pc:sldMk cId="0" sldId="259"/>
-            <ac:spMk id="12" creationId="{00000000-0000-0000-0000-000000000000}"/>
-          </ac:spMkLst>
-        </pc:spChg>
-        <pc:spChg chg="del">
-          <ac:chgData name="kulwinder bhamra" userId="a12914428fb3a095" providerId="LiveId" clId="{F9C495C9-0E7D-43E7-AD41-513FD928BDD5}" dt="2026-05-11T23:04:53.836" v="77" actId="26606"/>
-          <ac:spMkLst>
-            <pc:docMk/>
-            <pc:sldMk cId="0" sldId="259"/>
-            <ac:spMk id="13" creationId="{00000000-0000-0000-0000-000000000000}"/>
-          </ac:spMkLst>
-        </pc:spChg>
-        <pc:spChg chg="mod replId">
-          <ac:chgData name="kulwinder bhamra" userId="a12914428fb3a095" providerId="LiveId" clId="{F9C495C9-0E7D-43E7-AD41-513FD928BDD5}" dt="2026-05-11T23:04:53.079" v="76" actId="26606"/>
-          <ac:spMkLst>
-            <pc:docMk/>
-            <pc:sldMk cId="0" sldId="259"/>
-            <ac:spMk id="15" creationId="{00000000-0000-0000-0000-000000000000}"/>
-          </ac:spMkLst>
-        </pc:spChg>
-        <pc:graphicFrameChg chg="mod">
-          <ac:chgData name="kulwinder bhamra" userId="a12914428fb3a095" providerId="LiveId" clId="{F9C495C9-0E7D-43E7-AD41-513FD928BDD5}" dt="2026-05-11T23:19:50.983" v="79" actId="26606"/>
-          <ac:graphicFrameMkLst>
-            <pc:docMk/>
-            <pc:sldMk cId="0" sldId="259"/>
-            <ac:graphicFrameMk id="5" creationId="{00000000-0000-0000-0000-000000000000}"/>
-          </ac:graphicFrameMkLst>
-        </pc:graphicFrameChg>
-      </pc:sldChg>
-      <pc:sldChg chg="addSp delSp modSp add mod setBg modNotes">
-        <pc:chgData name="kulwinder bhamra" userId="a12914428fb3a095" providerId="LiveId" clId="{F9C495C9-0E7D-43E7-AD41-513FD928BDD5}" dt="2026-05-11T23:19:50.983" v="79" actId="26606"/>
-        <pc:sldMkLst>
-          <pc:docMk/>
-          <pc:sldMk cId="0" sldId="260"/>
-        </pc:sldMkLst>
-        <pc:spChg chg="mod">
-          <ac:chgData name="kulwinder bhamra" userId="a12914428fb3a095" providerId="LiveId" clId="{F9C495C9-0E7D-43E7-AD41-513FD928BDD5}" dt="2026-05-11T23:04:53.836" v="77" actId="26606"/>
-          <ac:spMkLst>
-            <pc:docMk/>
-            <pc:sldMk cId="0" sldId="260"/>
-            <ac:spMk id="2" creationId="{00000000-0000-0000-0000-000000000000}"/>
-          </ac:spMkLst>
-        </pc:spChg>
-        <pc:spChg chg="add">
-          <ac:chgData name="kulwinder bhamra" userId="a12914428fb3a095" providerId="LiveId" clId="{F9C495C9-0E7D-43E7-AD41-513FD928BDD5}" dt="2026-05-11T23:04:53.836" v="77" actId="26606"/>
-          <ac:spMkLst>
-            <pc:docMk/>
-            <pc:sldMk cId="0" sldId="260"/>
-            <ac:spMk id="4" creationId="{00000000-0000-0000-0000-000000000000}"/>
-          </ac:spMkLst>
-        </pc:spChg>
-        <pc:spChg chg="add">
-          <ac:chgData name="kulwinder bhamra" userId="a12914428fb3a095" providerId="LiveId" clId="{F9C495C9-0E7D-43E7-AD41-513FD928BDD5}" dt="2026-05-11T23:04:53.836" v="77" actId="26606"/>
-          <ac:spMkLst>
-            <pc:docMk/>
-            <pc:sldMk cId="0" sldId="260"/>
-            <ac:spMk id="6" creationId="{00000000-0000-0000-0000-000000000000}"/>
-          </ac:spMkLst>
-        </pc:spChg>
-        <pc:spChg chg="add">
-          <ac:chgData name="kulwinder bhamra" userId="a12914428fb3a095" providerId="LiveId" clId="{F9C495C9-0E7D-43E7-AD41-513FD928BDD5}" dt="2026-05-11T23:04:53.836" v="77" actId="26606"/>
-          <ac:spMkLst>
-            <pc:docMk/>
-            <pc:sldMk cId="0" sldId="260"/>
-            <ac:spMk id="8" creationId="{00000000-0000-0000-0000-000000000000}"/>
-          </ac:spMkLst>
-        </pc:spChg>
-        <pc:spChg chg="add">
-          <ac:chgData name="kulwinder bhamra" userId="a12914428fb3a095" providerId="LiveId" clId="{F9C495C9-0E7D-43E7-AD41-513FD928BDD5}" dt="2026-05-11T23:04:53.836" v="77" actId="26606"/>
-          <ac:spMkLst>
-            <pc:docMk/>
-            <pc:sldMk cId="0" sldId="260"/>
-            <ac:spMk id="10" creationId="{00000000-0000-0000-0000-000000000000}"/>
-          </ac:spMkLst>
-        </pc:spChg>
-        <pc:spChg chg="add">
-          <ac:chgData name="kulwinder bhamra" userId="a12914428fb3a095" providerId="LiveId" clId="{F9C495C9-0E7D-43E7-AD41-513FD928BDD5}" dt="2026-05-11T23:04:53.836" v="77" actId="26606"/>
-          <ac:spMkLst>
-            <pc:docMk/>
-            <pc:sldMk cId="0" sldId="260"/>
-            <ac:spMk id="11" creationId="{00000000-0000-0000-0000-000000000000}"/>
-          </ac:spMkLst>
-        </pc:spChg>
-        <pc:spChg chg="add">
-          <ac:chgData name="kulwinder bhamra" userId="a12914428fb3a095" providerId="LiveId" clId="{F9C495C9-0E7D-43E7-AD41-513FD928BDD5}" dt="2026-05-11T23:04:53.836" v="77" actId="26606"/>
-          <ac:spMkLst>
-            <pc:docMk/>
-            <pc:sldMk cId="0" sldId="260"/>
-            <ac:spMk id="15" creationId="{00000000-0000-0000-0000-000000000000}"/>
-          </ac:spMkLst>
-        </pc:spChg>
-        <pc:spChg chg="add">
-          <ac:chgData name="kulwinder bhamra" userId="a12914428fb3a095" providerId="LiveId" clId="{F9C495C9-0E7D-43E7-AD41-513FD928BDD5}" dt="2026-05-11T23:04:53.836" v="77" actId="26606"/>
-          <ac:spMkLst>
-            <pc:docMk/>
-            <pc:sldMk cId="0" sldId="260"/>
-            <ac:spMk id="17" creationId="{00000000-0000-0000-0000-000000000000}"/>
-          </ac:spMkLst>
-        </pc:spChg>
-        <pc:spChg chg="add">
-          <ac:chgData name="kulwinder bhamra" userId="a12914428fb3a095" providerId="LiveId" clId="{F9C495C9-0E7D-43E7-AD41-513FD928BDD5}" dt="2026-05-11T23:04:53.836" v="77" actId="26606"/>
-          <ac:spMkLst>
-            <pc:docMk/>
-            <pc:sldMk cId="0" sldId="260"/>
-            <ac:spMk id="19" creationId="{00000000-0000-0000-0000-000000000000}"/>
-          </ac:spMkLst>
-        </pc:spChg>
-        <pc:spChg chg="add">
-          <ac:chgData name="kulwinder bhamra" userId="a12914428fb3a095" providerId="LiveId" clId="{F9C495C9-0E7D-43E7-AD41-513FD928BDD5}" dt="2026-05-11T23:04:53.836" v="77" actId="26606"/>
-          <ac:spMkLst>
-            <pc:docMk/>
-            <pc:sldMk cId="0" sldId="260"/>
-            <ac:spMk id="20" creationId="{00000000-0000-0000-0000-000000000000}"/>
-          </ac:spMkLst>
-        </pc:spChg>
-        <pc:spChg chg="mod">
-          <ac:chgData name="kulwinder bhamra" userId="a12914428fb3a095" providerId="LiveId" clId="{F9C495C9-0E7D-43E7-AD41-513FD928BDD5}" dt="2026-05-11T23:19:50.983" v="79" actId="26606"/>
-          <ac:spMkLst>
-            <pc:docMk/>
-            <pc:sldMk cId="0" sldId="260"/>
-            <ac:spMk id="22" creationId="{00000000-0000-0000-0000-000000000000}"/>
-          </ac:spMkLst>
-        </pc:spChg>
-        <pc:graphicFrameChg chg="mod replId">
-          <ac:chgData name="kulwinder bhamra" userId="a12914428fb3a095" providerId="LiveId" clId="{F9C495C9-0E7D-43E7-AD41-513FD928BDD5}" dt="2026-05-11T23:04:53.079" v="76" actId="26606"/>
-          <ac:graphicFrameMkLst>
-            <pc:docMk/>
-            <pc:sldMk cId="0" sldId="260"/>
-            <ac:graphicFrameMk id="23" creationId="{00000000-0000-0000-0000-000000000000}"/>
-          </ac:graphicFrameMkLst>
-        </pc:graphicFrameChg>
-      </pc:sldChg>
-      <pc:sldChg chg="addSp delSp modSp add mod setBg modNotes">
-        <pc:chgData name="kulwinder bhamra" userId="a12914428fb3a095" providerId="LiveId" clId="{F9C495C9-0E7D-43E7-AD41-513FD928BDD5}" dt="2026-05-11T23:19:50.983" v="79" actId="26606"/>
-        <pc:sldMkLst>
-          <pc:docMk/>
-          <pc:sldMk cId="0" sldId="261"/>
-        </pc:sldMkLst>
-        <pc:spChg chg="del mod">
-          <ac:chgData name="kulwinder bhamra" userId="a12914428fb3a095" providerId="LiveId" clId="{F9C495C9-0E7D-43E7-AD41-513FD928BDD5}" dt="2026-05-11T23:19:50.983" v="79" actId="26606"/>
-          <ac:spMkLst>
-            <pc:docMk/>
-            <pc:sldMk cId="0" sldId="261"/>
-            <ac:spMk id="7" creationId="{00000000-0000-0000-0000-000000000000}"/>
-          </ac:spMkLst>
-        </pc:spChg>
-        <pc:spChg chg="del mod">
-          <ac:chgData name="kulwinder bhamra" userId="a12914428fb3a095" providerId="LiveId" clId="{F9C495C9-0E7D-43E7-AD41-513FD928BDD5}" dt="2026-05-11T23:19:50.983" v="79" actId="26606"/>
-          <ac:spMkLst>
-            <pc:docMk/>
-            <pc:sldMk cId="0" sldId="261"/>
-            <ac:spMk id="8" creationId="{00000000-0000-0000-0000-000000000000}"/>
-          </ac:spMkLst>
-        </pc:spChg>
-        <pc:spChg chg="del mod">
-          <ac:chgData name="kulwinder bhamra" userId="a12914428fb3a095" providerId="LiveId" clId="{F9C495C9-0E7D-43E7-AD41-513FD928BDD5}" dt="2026-05-11T23:19:50.983" v="79" actId="26606"/>
-          <ac:spMkLst>
-            <pc:docMk/>
-            <pc:sldMk cId="0" sldId="261"/>
-            <ac:spMk id="10" creationId="{00000000-0000-0000-0000-000000000000}"/>
-          </ac:spMkLst>
-        </pc:spChg>
-        <pc:spChg chg="del mod">
-          <ac:chgData name="kulwinder bhamra" userId="a12914428fb3a095" providerId="LiveId" clId="{F9C495C9-0E7D-43E7-AD41-513FD928BDD5}" dt="2026-05-11T23:19:50.983" v="79" actId="26606"/>
-          <ac:spMkLst>
-            <pc:docMk/>
-            <pc:sldMk cId="0" sldId="261"/>
-            <ac:spMk id="12" creationId="{00000000-0000-0000-0000-000000000000}"/>
-          </ac:spMkLst>
-        </pc:spChg>
-        <pc:spChg chg="del mod">
-          <ac:chgData name="kulwinder bhamra" userId="a12914428fb3a095" providerId="LiveId" clId="{F9C495C9-0E7D-43E7-AD41-513FD928BDD5}" dt="2026-05-11T23:19:50.983" v="79" actId="26606"/>
-          <ac:spMkLst>
-            <pc:docMk/>
-            <pc:sldMk cId="0" sldId="261"/>
-            <ac:spMk id="13" creationId="{00000000-0000-0000-0000-000000000000}"/>
-          </ac:spMkLst>
-        </pc:spChg>
-        <pc:spChg chg="del mod">
-          <ac:chgData name="kulwinder bhamra" userId="a12914428fb3a095" providerId="LiveId" clId="{F9C495C9-0E7D-43E7-AD41-513FD928BDD5}" dt="2026-05-11T23:19:50.983" v="79" actId="26606"/>
-          <ac:spMkLst>
-            <pc:docMk/>
-            <pc:sldMk cId="0" sldId="261"/>
-            <ac:spMk id="17" creationId="{00000000-0000-0000-0000-000000000000}"/>
-          </ac:spMkLst>
-        </pc:spChg>
-        <pc:spChg chg="del mod">
-          <ac:chgData name="kulwinder bhamra" userId="a12914428fb3a095" providerId="LiveId" clId="{F9C495C9-0E7D-43E7-AD41-513FD928BDD5}" dt="2026-05-11T23:19:50.983" v="79" actId="26606"/>
-          <ac:spMkLst>
-            <pc:docMk/>
-            <pc:sldMk cId="0" sldId="261"/>
-            <ac:spMk id="18" creationId="{00000000-0000-0000-0000-000000000000}"/>
-          </ac:spMkLst>
-        </pc:spChg>
-        <pc:spChg chg="del mod">
-          <ac:chgData name="kulwinder bhamra" userId="a12914428fb3a095" providerId="LiveId" clId="{F9C495C9-0E7D-43E7-AD41-513FD928BDD5}" dt="2026-05-11T23:19:50.983" v="79" actId="26606"/>
-          <ac:spMkLst>
-            <pc:docMk/>
-            <pc:sldMk cId="0" sldId="261"/>
-            <ac:spMk id="20" creationId="{00000000-0000-0000-0000-000000000000}"/>
-          </ac:spMkLst>
-        </pc:spChg>
-        <pc:spChg chg="del mod">
-          <ac:chgData name="kulwinder bhamra" userId="a12914428fb3a095" providerId="LiveId" clId="{F9C495C9-0E7D-43E7-AD41-513FD928BDD5}" dt="2026-05-11T23:19:50.983" v="79" actId="26606"/>
-          <ac:spMkLst>
-            <pc:docMk/>
-            <pc:sldMk cId="0" sldId="261"/>
-            <ac:spMk id="21" creationId="{00000000-0000-0000-0000-000000000000}"/>
-          </ac:spMkLst>
-        </pc:spChg>
-        <pc:spChg chg="del mod replId">
-          <ac:chgData name="kulwinder bhamra" userId="a12914428fb3a095" providerId="LiveId" clId="{F9C495C9-0E7D-43E7-AD41-513FD928BDD5}" dt="2026-05-11T23:19:50.983" v="79" actId="26606"/>
-          <ac:spMkLst>
-            <pc:docMk/>
-            <pc:sldMk cId="0" sldId="261"/>
-            <ac:spMk id="22" creationId="{00000000-0000-0000-0000-000000000000}"/>
-          </ac:spMkLst>
-        </pc:spChg>
-        <pc:spChg chg="mod replId">
-          <ac:chgData name="kulwinder bhamra" userId="a12914428fb3a095" providerId="LiveId" clId="{F9C495C9-0E7D-43E7-AD41-513FD928BDD5}" dt="2026-05-11T23:19:50.327" v="78" actId="26606"/>
-          <ac:spMkLst>
-            <pc:docMk/>
-            <pc:sldMk cId="0" sldId="261"/>
-            <ac:spMk id="23" creationId="{00000000-0000-0000-0000-000000000000}"/>
-          </ac:spMkLst>
-        </pc:spChg>
-        <pc:spChg chg="mod replId">
-          <ac:chgData name="kulwinder bhamra" userId="a12914428fb3a095" providerId="LiveId" clId="{F9C495C9-0E7D-43E7-AD41-513FD928BDD5}" dt="2026-05-11T23:19:50.327" v="78" actId="26606"/>
-          <ac:spMkLst>
-            <pc:docMk/>
-            <pc:sldMk cId="0" sldId="261"/>
-            <ac:spMk id="24" creationId="{00000000-0000-0000-0000-000000000000}"/>
-          </ac:spMkLst>
-        </pc:spChg>
-      </pc:sldChg>
-      <pc:sldChg chg="addSp delSp modSp add mod setBg modNotes">
-        <pc:chgData name="kulwinder bhamra" userId="a12914428fb3a095" providerId="LiveId" clId="{F9C495C9-0E7D-43E7-AD41-513FD928BDD5}" dt="2026-05-11T23:19:50.983" v="79" actId="26606"/>
-        <pc:sldMkLst>
-          <pc:docMk/>
-          <pc:sldMk cId="0" sldId="262"/>
-        </pc:sldMkLst>
-        <pc:spChg chg="mod">
-          <ac:chgData name="kulwinder bhamra" userId="a12914428fb3a095" providerId="LiveId" clId="{F9C495C9-0E7D-43E7-AD41-513FD928BDD5}" dt="2026-05-11T23:19:50.983" v="79" actId="26606"/>
-          <ac:spMkLst>
-            <pc:docMk/>
-            <pc:sldMk cId="0" sldId="262"/>
-            <ac:spMk id="2" creationId="{00000000-0000-0000-0000-000000000000}"/>
-          </ac:spMkLst>
-        </pc:spChg>
-        <pc:spChg chg="del mod">
-          <ac:chgData name="kulwinder bhamra" userId="a12914428fb3a095" providerId="LiveId" clId="{F9C495C9-0E7D-43E7-AD41-513FD928BDD5}" dt="2026-05-11T23:19:50.983" v="79" actId="26606"/>
-          <ac:spMkLst>
-            <pc:docMk/>
-            <pc:sldMk cId="0" sldId="262"/>
-            <ac:spMk id="5" creationId="{00000000-0000-0000-0000-000000000000}"/>
-          </ac:spMkLst>
-        </pc:spChg>
-        <pc:spChg chg="del mod">
-          <ac:chgData name="kulwinder bhamra" userId="a12914428fb3a095" providerId="LiveId" clId="{F9C495C9-0E7D-43E7-AD41-513FD928BDD5}" dt="2026-05-11T23:19:50.983" v="79" actId="26606"/>
-          <ac:spMkLst>
-            <pc:docMk/>
-            <pc:sldMk cId="0" sldId="262"/>
-            <ac:spMk id="7" creationId="{00000000-0000-0000-0000-000000000000}"/>
-          </ac:spMkLst>
-        </pc:spChg>
-        <pc:spChg chg="del mod">
-          <ac:chgData name="kulwinder bhamra" userId="a12914428fb3a095" providerId="LiveId" clId="{F9C495C9-0E7D-43E7-AD41-513FD928BDD5}" dt="2026-05-11T23:19:50.983" v="79" actId="26606"/>
-          <ac:spMkLst>
-            <pc:docMk/>
-            <pc:sldMk cId="0" sldId="262"/>
-            <ac:spMk id="9" creationId="{00000000-0000-0000-0000-000000000000}"/>
-          </ac:spMkLst>
-        </pc:spChg>
-        <pc:spChg chg="del mod">
-          <ac:chgData name="kulwinder bhamra" userId="a12914428fb3a095" providerId="LiveId" clId="{F9C495C9-0E7D-43E7-AD41-513FD928BDD5}" dt="2026-05-11T23:19:50.983" v="79" actId="26606"/>
-          <ac:spMkLst>
-            <pc:docMk/>
-            <pc:sldMk cId="0" sldId="262"/>
-            <ac:spMk id="10" creationId="{00000000-0000-0000-0000-000000000000}"/>
-          </ac:spMkLst>
-        </pc:spChg>
-        <pc:spChg chg="del mod">
-          <ac:chgData name="kulwinder bhamra" userId="a12914428fb3a095" providerId="LiveId" clId="{F9C495C9-0E7D-43E7-AD41-513FD928BDD5}" dt="2026-05-11T23:19:50.983" v="79" actId="26606"/>
-          <ac:spMkLst>
-            <pc:docMk/>
-            <pc:sldMk cId="0" sldId="262"/>
-            <ac:spMk id="12" creationId="{00000000-0000-0000-0000-000000000000}"/>
-          </ac:spMkLst>
-        </pc:spChg>
-        <pc:spChg chg="add del">
-          <ac:chgData name="kulwinder bhamra" userId="a12914428fb3a095" providerId="LiveId" clId="{F9C495C9-0E7D-43E7-AD41-513FD928BDD5}" dt="2026-05-11T23:19:50.983" v="79" actId="26606"/>
-          <ac:spMkLst>
-            <pc:docMk/>
-            <pc:sldMk cId="0" sldId="262"/>
-            <ac:spMk id="14" creationId="{00000000-0000-0000-0000-000000000000}"/>
-          </ac:spMkLst>
-        </pc:spChg>
-        <pc:spChg chg="add del">
-          <ac:chgData name="kulwinder bhamra" userId="a12914428fb3a095" providerId="LiveId" clId="{F9C495C9-0E7D-43E7-AD41-513FD928BDD5}" dt="2026-05-11T23:19:50.983" v="79" actId="26606"/>
-          <ac:spMkLst>
-            <pc:docMk/>
-            <pc:sldMk cId="0" sldId="262"/>
-            <ac:spMk id="15" creationId="{00000000-0000-0000-0000-000000000000}"/>
-          </ac:spMkLst>
-        </pc:spChg>
-        <pc:spChg chg="add del">
-          <ac:chgData name="kulwinder bhamra" userId="a12914428fb3a095" providerId="LiveId" clId="{F9C495C9-0E7D-43E7-AD41-513FD928BDD5}" dt="2026-05-11T23:19:50.983" v="79" actId="26606"/>
-          <ac:spMkLst>
-            <pc:docMk/>
-            <pc:sldMk cId="0" sldId="262"/>
-            <ac:spMk id="16" creationId="{00000000-0000-0000-0000-000000000000}"/>
-          </ac:spMkLst>
-        </pc:spChg>
-        <pc:spChg chg="mod replId">
-          <ac:chgData name="kulwinder bhamra" userId="a12914428fb3a095" providerId="LiveId" clId="{F9C495C9-0E7D-43E7-AD41-513FD928BDD5}" dt="2026-05-11T23:04:53.079" v="76" actId="26606"/>
-          <ac:spMkLst>
-            <pc:docMk/>
-            <pc:sldMk cId="0" sldId="262"/>
-            <ac:spMk id="18" creationId="{00000000-0000-0000-0000-000000000000}"/>
-          </ac:spMkLst>
-        </pc:spChg>
-        <pc:spChg chg="del mod replId">
-          <ac:chgData name="kulwinder bhamra" userId="a12914428fb3a095" providerId="LiveId" clId="{F9C495C9-0E7D-43E7-AD41-513FD928BDD5}" dt="2026-05-11T23:19:50.983" v="79" actId="26606"/>
-          <ac:spMkLst>
-            <pc:docMk/>
-            <pc:sldMk cId="0" sldId="262"/>
-            <ac:spMk id="19" creationId="{00000000-0000-0000-0000-000000000000}"/>
-          </ac:spMkLst>
-        </pc:spChg>
-        <pc:graphicFrameChg chg="mod replId">
-          <ac:chgData name="kulwinder bhamra" userId="a12914428fb3a095" providerId="LiveId" clId="{F9C495C9-0E7D-43E7-AD41-513FD928BDD5}" dt="2026-05-11T23:19:50.327" v="78" actId="26606"/>
-          <ac:graphicFrameMkLst>
-            <pc:docMk/>
-            <pc:sldMk cId="0" sldId="262"/>
-            <ac:graphicFrameMk id="18" creationId="{00000000-0000-0000-0000-000000000000}"/>
-          </ac:graphicFrameMkLst>
-        </pc:graphicFrameChg>
-      </pc:sldChg>
-      <pc:sldChg chg="addSp delSp modSp add mod setBg modNotes">
-        <pc:chgData name="kulwinder bhamra" userId="a12914428fb3a095" providerId="LiveId" clId="{F9C495C9-0E7D-43E7-AD41-513FD928BDD5}" dt="2026-05-11T23:19:50.983" v="79" actId="26606"/>
-        <pc:sldMkLst>
-          <pc:docMk/>
-          <pc:sldMk cId="0" sldId="263"/>
-        </pc:sldMkLst>
-        <pc:spChg chg="mod">
-          <ac:chgData name="kulwinder bhamra" userId="a12914428fb3a095" providerId="LiveId" clId="{F9C495C9-0E7D-43E7-AD41-513FD928BDD5}" dt="2026-05-11T23:19:50.983" v="79" actId="26606"/>
-          <ac:spMkLst>
-            <pc:docMk/>
-            <pc:sldMk cId="0" sldId="263"/>
-            <ac:spMk id="2" creationId="{00000000-0000-0000-0000-000000000000}"/>
-          </ac:spMkLst>
-        </pc:spChg>
-        <pc:spChg chg="mod">
-          <ac:chgData name="kulwinder bhamra" userId="a12914428fb3a095" providerId="LiveId" clId="{F9C495C9-0E7D-43E7-AD41-513FD928BDD5}" dt="2026-05-11T23:19:50.983" v="79" actId="26606"/>
-          <ac:spMkLst>
-            <pc:docMk/>
-            <pc:sldMk cId="0" sldId="263"/>
-            <ac:spMk id="4" creationId="{00000000-0000-0000-0000-000000000000}"/>
-          </ac:spMkLst>
-        </pc:spChg>
-        <pc:spChg chg="mod">
-          <ac:chgData name="kulwinder bhamra" userId="a12914428fb3a095" providerId="LiveId" clId="{F9C495C9-0E7D-43E7-AD41-513FD928BDD5}" dt="2026-05-11T23:04:53.836" v="77" actId="26606"/>
-          <ac:spMkLst>
-            <pc:docMk/>
-            <pc:sldMk cId="0" sldId="263"/>
-            <ac:spMk id="5" creationId="{00000000-0000-0000-0000-000000000000}"/>
-          </ac:spMkLst>
-        </pc:spChg>
-        <pc:spChg chg="add mod">
-          <ac:chgData name="kulwinder bhamra" userId="a12914428fb3a095" providerId="LiveId" clId="{F9C495C9-0E7D-43E7-AD41-513FD928BDD5}" dt="2026-05-11T23:19:50.983" v="79" actId="26606"/>
-          <ac:spMkLst>
-            <pc:docMk/>
-            <pc:sldMk cId="0" sldId="263"/>
-            <ac:spMk id="6" creationId="{00000000-0000-0000-0000-000000000000}"/>
-          </ac:spMkLst>
-        </pc:spChg>
-        <pc:spChg chg="mod">
-          <ac:chgData name="kulwinder bhamra" userId="a12914428fb3a095" providerId="LiveId" clId="{F9C495C9-0E7D-43E7-AD41-513FD928BDD5}" dt="2026-05-11T23:19:50.983" v="79" actId="26606"/>
-          <ac:spMkLst>
-            <pc:docMk/>
-            <pc:sldMk cId="0" sldId="263"/>
-            <ac:spMk id="8" creationId="{00000000-0000-0000-0000-000000000000}"/>
-          </ac:spMkLst>
-        </pc:spChg>
-        <pc:spChg chg="mod">
-          <ac:chgData name="kulwinder bhamra" userId="a12914428fb3a095" providerId="LiveId" clId="{F9C495C9-0E7D-43E7-AD41-513FD928BDD5}" dt="2026-05-11T23:04:53.836" v="77" actId="26606"/>
-          <ac:spMkLst>
-            <pc:docMk/>
-            <pc:sldMk cId="0" sldId="263"/>
-            <ac:spMk id="9" creationId="{00000000-0000-0000-0000-000000000000}"/>
-          </ac:spMkLst>
-        </pc:spChg>
-        <pc:spChg chg="mod">
-          <ac:chgData name="kulwinder bhamra" userId="a12914428fb3a095" providerId="LiveId" clId="{F9C495C9-0E7D-43E7-AD41-513FD928BDD5}" dt="2026-05-11T23:19:50.983" v="79" actId="26606"/>
-          <ac:spMkLst>
-            <pc:docMk/>
-            <pc:sldMk cId="0" sldId="263"/>
-            <ac:spMk id="11" creationId="{00000000-0000-0000-0000-000000000000}"/>
-          </ac:spMkLst>
-        </pc:spChg>
-        <pc:spChg chg="mod">
-          <ac:chgData name="kulwinder bhamra" userId="a12914428fb3a095" providerId="LiveId" clId="{F9C495C9-0E7D-43E7-AD41-513FD928BDD5}" dt="2026-05-11T23:19:50.983" v="79" actId="26606"/>
-          <ac:spMkLst>
-            <pc:docMk/>
-            <pc:sldMk cId="0" sldId="263"/>
-            <ac:spMk id="12" creationId="{00000000-0000-0000-0000-000000000000}"/>
-          </ac:spMkLst>
-        </pc:spChg>
-        <pc:spChg chg="add">
-          <ac:chgData name="kulwinder bhamra" userId="a12914428fb3a095" providerId="LiveId" clId="{F9C495C9-0E7D-43E7-AD41-513FD928BDD5}" dt="2026-05-11T23:19:50.983" v="79" actId="26606"/>
-          <ac:spMkLst>
-            <pc:docMk/>
-            <pc:sldMk cId="0" sldId="263"/>
-            <ac:spMk id="13" creationId="{00000000-0000-0000-0000-000000000000}"/>
-          </ac:spMkLst>
-        </pc:spChg>
-        <pc:spChg chg="add">
-          <ac:chgData name="kulwinder bhamra" userId="a12914428fb3a095" providerId="LiveId" clId="{F9C495C9-0E7D-43E7-AD41-513FD928BDD5}" dt="2026-05-11T23:04:53.836" v="77" actId="26606"/>
-          <ac:spMkLst>
-            <pc:docMk/>
-            <pc:sldMk cId="0" sldId="263"/>
-            <ac:spMk id="14" creationId="{00000000-0000-0000-0000-000000000000}"/>
-          </ac:spMkLst>
-        </pc:spChg>
-        <pc:spChg chg="add">
-          <ac:chgData name="kulwinder bhamra" userId="a12914428fb3a095" providerId="LiveId" clId="{F9C495C9-0E7D-43E7-AD41-513FD928BDD5}" dt="2026-05-11T23:19:50.983" v="79" actId="26606"/>
-          <ac:spMkLst>
-            <pc:docMk/>
-            <pc:sldMk cId="0" sldId="263"/>
-            <ac:spMk id="15" creationId="{00000000-0000-0000-0000-000000000000}"/>
-          </ac:spMkLst>
-        </pc:spChg>
-        <pc:spChg chg="add">
-          <ac:chgData name="kulwinder bhamra" userId="a12914428fb3a095" providerId="LiveId" clId="{F9C495C9-0E7D-43E7-AD41-513FD928BDD5}" dt="2026-05-11T23:19:50.983" v="79" actId="26606"/>
-          <ac:spMkLst>
-            <pc:docMk/>
-            <pc:sldMk cId="0" sldId="263"/>
-            <ac:spMk id="16" creationId="{00000000-0000-0000-0000-000000000000}"/>
-          </ac:spMkLst>
-        </pc:spChg>
-        <pc:spChg chg="add del">
-          <ac:chgData name="kulwinder bhamra" userId="a12914428fb3a095" providerId="LiveId" clId="{F9C495C9-0E7D-43E7-AD41-513FD928BDD5}" dt="2026-05-11T23:19:50.983" v="79" actId="26606"/>
-          <ac:spMkLst>
-            <pc:docMk/>
-            <pc:sldMk cId="0" sldId="263"/>
-            <ac:spMk id="19" creationId="{00000000-0000-0000-0000-000000000000}"/>
-          </ac:spMkLst>
-        </pc:spChg>
-        <pc:spChg chg="del">
-          <ac:chgData name="kulwinder bhamra" userId="a12914428fb3a095" providerId="LiveId" clId="{F9C495C9-0E7D-43E7-AD41-513FD928BDD5}" dt="2026-05-11T23:04:53.836" v="77" actId="26606"/>
-          <ac:spMkLst>
-            <pc:docMk/>
-            <pc:sldMk cId="0" sldId="263"/>
-            <ac:spMk id="21" creationId="{00000000-0000-0000-0000-000000000000}"/>
-          </ac:spMkLst>
-        </pc:spChg>
-        <pc:spChg chg="del">
-          <ac:chgData name="kulwinder bhamra" userId="a12914428fb3a095" providerId="LiveId" clId="{F9C495C9-0E7D-43E7-AD41-513FD928BDD5}" dt="2026-05-11T23:04:53.836" v="77" actId="26606"/>
-          <ac:spMkLst>
-            <pc:docMk/>
-            <pc:sldMk cId="0" sldId="263"/>
-            <ac:spMk id="23" creationId="{00000000-0000-0000-0000-000000000000}"/>
-          </ac:spMkLst>
-        </pc:spChg>
-        <pc:spChg chg="del">
-          <ac:chgData name="kulwinder bhamra" userId="a12914428fb3a095" providerId="LiveId" clId="{F9C495C9-0E7D-43E7-AD41-513FD928BDD5}" dt="2026-05-11T23:04:53.836" v="77" actId="26606"/>
-          <ac:spMkLst>
-            <pc:docMk/>
-            <pc:sldMk cId="0" sldId="263"/>
-            <ac:spMk id="24" creationId="{00000000-0000-0000-0000-000000000000}"/>
-          </ac:spMkLst>
-        </pc:spChg>
-        <pc:spChg chg="del mod replId">
-          <ac:chgData name="kulwinder bhamra" userId="a12914428fb3a095" providerId="LiveId" clId="{F9C495C9-0E7D-43E7-AD41-513FD928BDD5}" dt="2026-05-11T23:04:53.836" v="77" actId="26606"/>
-          <ac:spMkLst>
-            <pc:docMk/>
-            <pc:sldMk cId="0" sldId="263"/>
-            <ac:spMk id="26" creationId="{00000000-0000-0000-0000-000000000000}"/>
-          </ac:spMkLst>
-        </pc:spChg>
-        <pc:spChg chg="mod replId">
-          <ac:chgData name="kulwinder bhamra" userId="a12914428fb3a095" providerId="LiveId" clId="{F9C495C9-0E7D-43E7-AD41-513FD928BDD5}" dt="2026-05-11T23:04:53.079" v="76" actId="26606"/>
-          <ac:spMkLst>
-            <pc:docMk/>
-            <pc:sldMk cId="0" sldId="263"/>
-            <ac:spMk id="28" creationId="{00000000-0000-0000-0000-000000000000}"/>
-          </ac:spMkLst>
-        </pc:spChg>
-        <pc:picChg chg="mod replId">
-          <ac:chgData name="kulwinder bhamra" userId="a12914428fb3a095" providerId="LiveId" clId="{F9C495C9-0E7D-43E7-AD41-513FD928BDD5}" dt="2026-05-11T23:19:50.327" v="78" actId="26606"/>
-          <ac:picMkLst>
-            <pc:docMk/>
-            <pc:sldMk cId="0" sldId="263"/>
-            <ac:picMk id="22" creationId="{00000000-0000-0000-0000-000000000000}"/>
-          </ac:picMkLst>
-        </pc:picChg>
-        <pc:picChg chg="mod replId">
-          <ac:chgData name="kulwinder bhamra" userId="a12914428fb3a095" providerId="LiveId" clId="{F9C495C9-0E7D-43E7-AD41-513FD928BDD5}" dt="2026-05-11T23:19:50.327" v="78" actId="26606"/>
-          <ac:picMkLst>
-            <pc:docMk/>
-            <pc:sldMk cId="0" sldId="263"/>
-            <ac:picMk id="23" creationId="{00000000-0000-0000-0000-000000000000}"/>
-          </ac:picMkLst>
-        </pc:picChg>
-        <pc:picChg chg="mod replId">
-          <ac:chgData name="kulwinder bhamra" userId="a12914428fb3a095" providerId="LiveId" clId="{F9C495C9-0E7D-43E7-AD41-513FD928BDD5}" dt="2026-05-11T23:04:53.079" v="76" actId="26606"/>
-          <ac:picMkLst>
-            <pc:docMk/>
-            <pc:sldMk cId="0" sldId="263"/>
-            <ac:picMk id="25" creationId="{00000000-0000-0000-0000-000000000000}"/>
-          </ac:picMkLst>
-        </pc:picChg>
-        <pc:picChg chg="mod replId">
-          <ac:chgData name="kulwinder bhamra" userId="a12914428fb3a095" providerId="LiveId" clId="{F9C495C9-0E7D-43E7-AD41-513FD928BDD5}" dt="2026-05-11T23:04:53.079" v="76" actId="26606"/>
-          <ac:picMkLst>
-            <pc:docMk/>
-            <pc:sldMk cId="0" sldId="263"/>
-            <ac:picMk id="27" creationId="{00000000-0000-0000-0000-000000000000}"/>
-          </ac:picMkLst>
-        </pc:picChg>
-        <pc:picChg chg="mod replId">
-          <ac:chgData name="kulwinder bhamra" userId="a12914428fb3a095" providerId="LiveId" clId="{F9C495C9-0E7D-43E7-AD41-513FD928BDD5}" dt="2026-05-11T23:04:53.079" v="76" actId="26606"/>
-          <ac:picMkLst>
-            <pc:docMk/>
-            <pc:sldMk cId="0" sldId="263"/>
-            <ac:picMk id="29" creationId="{00000000-0000-0000-0000-000000000000}"/>
-          </ac:picMkLst>
-        </pc:picChg>
-      </pc:sldChg>
       <pc:sldChg chg="addSp delSp modSp add mod modNotes">
-        <pc:chgData name="kulwinder bhamra" userId="a12914428fb3a095" providerId="LiveId" clId="{F9C495C9-0E7D-43E7-AD41-513FD928BDD5}" dt="2026-05-11T23:19:50.983" v="79" actId="26606"/>
+        <pc:chgData name="kulwinder bhamra" userId="a12914428fb3a095" providerId="LiveId" clId="{F9C495C9-0E7D-43E7-AD41-513FD928BDD5}" dt="2026-07-21T21:07:25.942" v="81" actId="26606"/>
         <pc:sldMkLst>
           <pc:docMk/>
           <pc:sldMk cId="0" sldId="264"/>
         </pc:sldMkLst>
-        <pc:spChg chg="mod">
-          <ac:chgData name="kulwinder bhamra" userId="a12914428fb3a095" providerId="LiveId" clId="{F9C495C9-0E7D-43E7-AD41-513FD928BDD5}" dt="2026-05-11T23:19:50.983" v="79" actId="26606"/>
-          <ac:spMkLst>
-            <pc:docMk/>
-            <pc:sldMk cId="0" sldId="264"/>
-            <ac:spMk id="2" creationId="{00000000-0000-0000-0000-000000000000}"/>
-          </ac:spMkLst>
-        </pc:spChg>
-        <pc:spChg chg="add">
-          <ac:chgData name="kulwinder bhamra" userId="a12914428fb3a095" providerId="LiveId" clId="{F9C495C9-0E7D-43E7-AD41-513FD928BDD5}" dt="2026-05-11T23:19:50.983" v="79" actId="26606"/>
-          <ac:spMkLst>
-            <pc:docMk/>
-            <pc:sldMk cId="0" sldId="264"/>
-            <ac:spMk id="6" creationId="{00000000-0000-0000-0000-000000000000}"/>
-          </ac:spMkLst>
-        </pc:spChg>
-        <pc:spChg chg="add">
-          <ac:chgData name="kulwinder bhamra" userId="a12914428fb3a095" providerId="LiveId" clId="{F9C495C9-0E7D-43E7-AD41-513FD928BDD5}" dt="2026-05-11T23:19:50.983" v="79" actId="26606"/>
-          <ac:spMkLst>
-            <pc:docMk/>
-            <pc:sldMk cId="0" sldId="264"/>
-            <ac:spMk id="7" creationId="{00000000-0000-0000-0000-000000000000}"/>
-          </ac:spMkLst>
-        </pc:spChg>
-        <pc:spChg chg="add">
-          <ac:chgData name="kulwinder bhamra" userId="a12914428fb3a095" providerId="LiveId" clId="{F9C495C9-0E7D-43E7-AD41-513FD928BDD5}" dt="2026-05-11T23:19:50.983" v="79" actId="26606"/>
-          <ac:spMkLst>
-            <pc:docMk/>
-            <pc:sldMk cId="0" sldId="264"/>
-            <ac:spMk id="9" creationId="{00000000-0000-0000-0000-000000000000}"/>
-          </ac:spMkLst>
-        </pc:spChg>
-        <pc:spChg chg="add">
-          <ac:chgData name="kulwinder bhamra" userId="a12914428fb3a095" providerId="LiveId" clId="{F9C495C9-0E7D-43E7-AD41-513FD928BDD5}" dt="2026-05-11T23:19:50.983" v="79" actId="26606"/>
-          <ac:spMkLst>
-            <pc:docMk/>
-            <pc:sldMk cId="0" sldId="264"/>
-            <ac:spMk id="10" creationId="{00000000-0000-0000-0000-000000000000}"/>
-          </ac:spMkLst>
-        </pc:spChg>
-        <pc:spChg chg="add">
-          <ac:chgData name="kulwinder bhamra" userId="a12914428fb3a095" providerId="LiveId" clId="{F9C495C9-0E7D-43E7-AD41-513FD928BDD5}" dt="2026-05-11T23:19:50.983" v="79" actId="26606"/>
-          <ac:spMkLst>
-            <pc:docMk/>
-            <pc:sldMk cId="0" sldId="264"/>
-            <ac:spMk id="11" creationId="{00000000-0000-0000-0000-000000000000}"/>
-          </ac:spMkLst>
-        </pc:spChg>
-        <pc:spChg chg="add">
-          <ac:chgData name="kulwinder bhamra" userId="a12914428fb3a095" providerId="LiveId" clId="{F9C495C9-0E7D-43E7-AD41-513FD928BDD5}" dt="2026-05-11T23:19:50.983" v="79" actId="26606"/>
-          <ac:spMkLst>
-            <pc:docMk/>
-            <pc:sldMk cId="0" sldId="264"/>
-            <ac:spMk id="12" creationId="{00000000-0000-0000-0000-000000000000}"/>
-          </ac:spMkLst>
-        </pc:spChg>
-        <pc:spChg chg="add">
-          <ac:chgData name="kulwinder bhamra" userId="a12914428fb3a095" providerId="LiveId" clId="{F9C495C9-0E7D-43E7-AD41-513FD928BDD5}" dt="2026-05-11T23:19:50.983" v="79" actId="26606"/>
-          <ac:spMkLst>
-            <pc:docMk/>
-            <pc:sldMk cId="0" sldId="264"/>
-            <ac:spMk id="14" creationId="{00000000-0000-0000-0000-000000000000}"/>
-          </ac:spMkLst>
-        </pc:spChg>
-        <pc:spChg chg="add">
-          <ac:chgData name="kulwinder bhamra" userId="a12914428fb3a095" providerId="LiveId" clId="{F9C495C9-0E7D-43E7-AD41-513FD928BDD5}" dt="2026-05-11T23:19:50.983" v="79" actId="26606"/>
-          <ac:spMkLst>
-            <pc:docMk/>
-            <pc:sldMk cId="0" sldId="264"/>
-            <ac:spMk id="15" creationId="{00000000-0000-0000-0000-000000000000}"/>
-          </ac:spMkLst>
-        </pc:spChg>
-        <pc:spChg chg="add">
-          <ac:chgData name="kulwinder bhamra" userId="a12914428fb3a095" providerId="LiveId" clId="{F9C495C9-0E7D-43E7-AD41-513FD928BDD5}" dt="2026-05-11T23:19:50.983" v="79" actId="26606"/>
-          <ac:spMkLst>
-            <pc:docMk/>
-            <pc:sldMk cId="0" sldId="264"/>
-            <ac:spMk id="17" creationId="{00000000-0000-0000-0000-000000000000}"/>
-          </ac:spMkLst>
-        </pc:spChg>
-        <pc:spChg chg="add mod replId">
-          <ac:chgData name="kulwinder bhamra" userId="a12914428fb3a095" providerId="LiveId" clId="{F9C495C9-0E7D-43E7-AD41-513FD928BDD5}" dt="2026-05-11T23:19:50.327" v="78" actId="26606"/>
-          <ac:spMkLst>
-            <pc:docMk/>
-            <pc:sldMk cId="0" sldId="264"/>
-            <ac:spMk id="18" creationId="{00000000-0000-0000-0000-000000000000}"/>
-          </ac:spMkLst>
-        </pc:spChg>
-        <pc:graphicFrameChg chg="del mod replId">
-          <ac:chgData name="kulwinder bhamra" userId="a12914428fb3a095" providerId="LiveId" clId="{F9C495C9-0E7D-43E7-AD41-513FD928BDD5}" dt="2026-05-11T23:04:53.836" v="77" actId="26606"/>
+        <pc:graphicFrameChg chg="mod">
+          <ac:chgData name="kulwinder bhamra" userId="a12914428fb3a095" providerId="LiveId" clId="{F9C495C9-0E7D-43E7-AD41-513FD928BDD5}" dt="2026-07-21T21:07:25.942" v="81" actId="26606"/>
           <ac:graphicFrameMkLst>
             <pc:docMk/>
             <pc:sldMk cId="0" sldId="264"/>
-            <ac:graphicFrameMk id="5" creationId="{00000000-0000-0000-0000-000000000000}"/>
-          </ac:graphicFrameMkLst>
-        </pc:graphicFrameChg>
-        <pc:graphicFrameChg chg="add mod replId">
-          <ac:chgData name="kulwinder bhamra" userId="a12914428fb3a095" providerId="LiveId" clId="{F9C495C9-0E7D-43E7-AD41-513FD928BDD5}" dt="2026-05-11T23:19:50.327" v="78" actId="26606"/>
-          <ac:graphicFrameMkLst>
-            <pc:docMk/>
-            <pc:sldMk cId="0" sldId="264"/>
-            <ac:graphicFrameMk id="19" creationId="{00000000-0000-0000-0000-000000000000}"/>
+            <ac:graphicFrameMk id="3" creationId="{00000000-0000-0000-0000-000000000000}"/>
           </ac:graphicFrameMkLst>
         </pc:graphicFrameChg>
       </pc:sldChg>
-      <pc:sldChg chg="addSp delSp modSp add mod setBg modNotes">
-        <pc:chgData name="kulwinder bhamra" userId="a12914428fb3a095" providerId="LiveId" clId="{F9C495C9-0E7D-43E7-AD41-513FD928BDD5}" dt="2026-05-11T23:19:50.983" v="79" actId="26606"/>
-        <pc:sldMkLst>
-          <pc:docMk/>
-          <pc:sldMk cId="0" sldId="265"/>
-        </pc:sldMkLst>
-        <pc:spChg chg="mod">
-          <ac:chgData name="kulwinder bhamra" userId="a12914428fb3a095" providerId="LiveId" clId="{F9C495C9-0E7D-43E7-AD41-513FD928BDD5}" dt="2026-05-11T23:19:50.983" v="79" actId="26606"/>
-          <ac:spMkLst>
-            <pc:docMk/>
-            <pc:sldMk cId="0" sldId="265"/>
-            <ac:spMk id="2" creationId="{00000000-0000-0000-0000-000000000000}"/>
-          </ac:spMkLst>
-        </pc:spChg>
-        <pc:spChg chg="mod">
-          <ac:chgData name="kulwinder bhamra" userId="a12914428fb3a095" providerId="LiveId" clId="{F9C495C9-0E7D-43E7-AD41-513FD928BDD5}" dt="2026-05-11T23:19:50.983" v="79" actId="26606"/>
-          <ac:spMkLst>
-            <pc:docMk/>
-            <pc:sldMk cId="0" sldId="265"/>
-            <ac:spMk id="3" creationId="{00000000-0000-0000-0000-000000000000}"/>
-          </ac:spMkLst>
-        </pc:spChg>
-        <pc:spChg chg="mod">
-          <ac:chgData name="kulwinder bhamra" userId="a12914428fb3a095" providerId="LiveId" clId="{F9C495C9-0E7D-43E7-AD41-513FD928BDD5}" dt="2026-05-11T23:19:50.983" v="79" actId="26606"/>
-          <ac:spMkLst>
-            <pc:docMk/>
-            <pc:sldMk cId="0" sldId="265"/>
-            <ac:spMk id="4" creationId="{00000000-0000-0000-0000-000000000000}"/>
-          </ac:spMkLst>
-        </pc:spChg>
-        <pc:spChg chg="mod">
-          <ac:chgData name="kulwinder bhamra" userId="a12914428fb3a095" providerId="LiveId" clId="{F9C495C9-0E7D-43E7-AD41-513FD928BDD5}" dt="2026-05-11T23:19:50.983" v="79" actId="26606"/>
-          <ac:spMkLst>
-            <pc:docMk/>
-            <pc:sldMk cId="0" sldId="265"/>
-            <ac:spMk id="5" creationId="{00000000-0000-0000-0000-000000000000}"/>
-          </ac:spMkLst>
-        </pc:spChg>
-        <pc:spChg chg="mod">
-          <ac:chgData name="kulwinder bhamra" userId="a12914428fb3a095" providerId="LiveId" clId="{F9C495C9-0E7D-43E7-AD41-513FD928BDD5}" dt="2026-05-11T23:19:50.983" v="79" actId="26606"/>
-          <ac:spMkLst>
-            <pc:docMk/>
-            <pc:sldMk cId="0" sldId="265"/>
-            <ac:spMk id="6" creationId="{00000000-0000-0000-0000-000000000000}"/>
-          </ac:spMkLst>
-        </pc:spChg>
-        <pc:spChg chg="mod">
-          <ac:chgData name="kulwinder bhamra" userId="a12914428fb3a095" providerId="LiveId" clId="{F9C495C9-0E7D-43E7-AD41-513FD928BDD5}" dt="2026-05-11T23:19:50.983" v="79" actId="26606"/>
-          <ac:spMkLst>
-            <pc:docMk/>
-            <pc:sldMk cId="0" sldId="265"/>
-            <ac:spMk id="8" creationId="{00000000-0000-0000-0000-000000000000}"/>
-          </ac:spMkLst>
-        </pc:spChg>
-        <pc:spChg chg="mod">
-          <ac:chgData name="kulwinder bhamra" userId="a12914428fb3a095" providerId="LiveId" clId="{F9C495C9-0E7D-43E7-AD41-513FD928BDD5}" dt="2026-05-11T23:19:50.983" v="79" actId="26606"/>
-          <ac:spMkLst>
-            <pc:docMk/>
-            <pc:sldMk cId="0" sldId="265"/>
-            <ac:spMk id="10" creationId="{00000000-0000-0000-0000-000000000000}"/>
-          </ac:spMkLst>
-        </pc:spChg>
-        <pc:spChg chg="add del">
-          <ac:chgData name="kulwinder bhamra" userId="a12914428fb3a095" providerId="LiveId" clId="{F9C495C9-0E7D-43E7-AD41-513FD928BDD5}" dt="2026-05-11T23:19:50.983" v="79" actId="26606"/>
-          <ac:spMkLst>
-            <pc:docMk/>
-            <pc:sldMk cId="0" sldId="265"/>
-            <ac:spMk id="12" creationId="{00000000-0000-0000-0000-000000000000}"/>
-          </ac:spMkLst>
-        </pc:spChg>
-        <pc:spChg chg="del">
-          <ac:chgData name="kulwinder bhamra" userId="a12914428fb3a095" providerId="LiveId" clId="{F9C495C9-0E7D-43E7-AD41-513FD928BDD5}" dt="2026-05-11T23:04:53.836" v="77" actId="26606"/>
-          <ac:spMkLst>
-            <pc:docMk/>
-            <pc:sldMk cId="0" sldId="265"/>
-            <ac:spMk id="13" creationId="{00000000-0000-0000-0000-000000000000}"/>
-          </ac:spMkLst>
-        </pc:spChg>
-        <pc:spChg chg="add del">
-          <ac:chgData name="kulwinder bhamra" userId="a12914428fb3a095" providerId="LiveId" clId="{F9C495C9-0E7D-43E7-AD41-513FD928BDD5}" dt="2026-05-11T23:19:50.983" v="79" actId="26606"/>
-          <ac:spMkLst>
-            <pc:docMk/>
-            <pc:sldMk cId="0" sldId="265"/>
-            <ac:spMk id="14" creationId="{00000000-0000-0000-0000-000000000000}"/>
-          </ac:spMkLst>
-        </pc:spChg>
-        <pc:spChg chg="del mod replId">
-          <ac:chgData name="kulwinder bhamra" userId="a12914428fb3a095" providerId="LiveId" clId="{F9C495C9-0E7D-43E7-AD41-513FD928BDD5}" dt="2026-05-11T23:19:50.983" v="79" actId="26606"/>
-          <ac:spMkLst>
-            <pc:docMk/>
-            <pc:sldMk cId="0" sldId="265"/>
-            <ac:spMk id="15" creationId="{00000000-0000-0000-0000-000000000000}"/>
-          </ac:spMkLst>
-        </pc:spChg>
-      </pc:sldChg>
       <pc:sldChg chg="addSp delSp modSp add mod modNotes">
-        <pc:chgData name="kulwinder bhamra" userId="a12914428fb3a095" providerId="LiveId" clId="{F9C495C9-0E7D-43E7-AD41-513FD928BDD5}" dt="2026-05-11T23:19:50.983" v="79" actId="26606"/>
+        <pc:chgData name="kulwinder bhamra" userId="a12914428fb3a095" providerId="LiveId" clId="{F9C495C9-0E7D-43E7-AD41-513FD928BDD5}" dt="2026-07-21T21:10:39.181" v="83" actId="26606"/>
         <pc:sldMkLst>
           <pc:docMk/>
           <pc:sldMk cId="0" sldId="266"/>
         </pc:sldMkLst>
-        <pc:spChg chg="mod">
-          <ac:chgData name="kulwinder bhamra" userId="a12914428fb3a095" providerId="LiveId" clId="{F9C495C9-0E7D-43E7-AD41-513FD928BDD5}" dt="2026-05-11T23:19:50.983" v="79" actId="26606"/>
-          <ac:spMkLst>
-            <pc:docMk/>
-            <pc:sldMk cId="0" sldId="266"/>
-            <ac:spMk id="2" creationId="{00000000-0000-0000-0000-000000000000}"/>
-          </ac:spMkLst>
-        </pc:spChg>
-        <pc:spChg chg="mod">
-          <ac:chgData name="kulwinder bhamra" userId="a12914428fb3a095" providerId="LiveId" clId="{F9C495C9-0E7D-43E7-AD41-513FD928BDD5}" dt="2026-05-11T23:19:50.983" v="79" actId="26606"/>
-          <ac:spMkLst>
-            <pc:docMk/>
-            <pc:sldMk cId="0" sldId="266"/>
-            <ac:spMk id="3" creationId="{00000000-0000-0000-0000-000000000000}"/>
-          </ac:spMkLst>
-        </pc:spChg>
-        <pc:spChg chg="del mod">
-          <ac:chgData name="kulwinder bhamra" userId="a12914428fb3a095" providerId="LiveId" clId="{F9C495C9-0E7D-43E7-AD41-513FD928BDD5}" dt="2026-05-11T23:19:50.983" v="79" actId="26606"/>
+        <pc:spChg chg="add del mod">
+          <ac:chgData name="kulwinder bhamra" userId="a12914428fb3a095" providerId="LiveId" clId="{F9C495C9-0E7D-43E7-AD41-513FD928BDD5}" dt="2026-07-21T21:10:39.181" v="83" actId="26606"/>
           <ac:spMkLst>
             <pc:docMk/>
             <pc:sldMk cId="0" sldId="266"/>
             <ac:spMk id="5" creationId="{00000000-0000-0000-0000-000000000000}"/>
           </ac:spMkLst>
         </pc:spChg>
-        <pc:spChg chg="del mod">
-          <ac:chgData name="kulwinder bhamra" userId="a12914428fb3a095" providerId="LiveId" clId="{F9C495C9-0E7D-43E7-AD41-513FD928BDD5}" dt="2026-05-11T23:19:50.983" v="79" actId="26606"/>
-          <ac:spMkLst>
-            <pc:docMk/>
-            <pc:sldMk cId="0" sldId="266"/>
-            <ac:spMk id="6" creationId="{00000000-0000-0000-0000-000000000000}"/>
-          </ac:spMkLst>
-        </pc:spChg>
-        <pc:spChg chg="del">
-          <ac:chgData name="kulwinder bhamra" userId="a12914428fb3a095" providerId="LiveId" clId="{F9C495C9-0E7D-43E7-AD41-513FD928BDD5}" dt="2026-05-11T23:19:50.983" v="79" actId="26606"/>
-          <ac:spMkLst>
-            <pc:docMk/>
-            <pc:sldMk cId="0" sldId="266"/>
-            <ac:spMk id="7" creationId="{00000000-0000-0000-0000-000000000000}"/>
-          </ac:spMkLst>
-        </pc:spChg>
-        <pc:spChg chg="del mod">
-          <ac:chgData name="kulwinder bhamra" userId="a12914428fb3a095" providerId="LiveId" clId="{F9C495C9-0E7D-43E7-AD41-513FD928BDD5}" dt="2026-05-11T23:19:50.983" v="79" actId="26606"/>
-          <ac:spMkLst>
-            <pc:docMk/>
-            <pc:sldMk cId="0" sldId="266"/>
-            <ac:spMk id="8" creationId="{00000000-0000-0000-0000-000000000000}"/>
-          </ac:spMkLst>
-        </pc:spChg>
-        <pc:spChg chg="del mod">
-          <ac:chgData name="kulwinder bhamra" userId="a12914428fb3a095" providerId="LiveId" clId="{F9C495C9-0E7D-43E7-AD41-513FD928BDD5}" dt="2026-05-11T23:19:50.983" v="79" actId="26606"/>
-          <ac:spMkLst>
-            <pc:docMk/>
-            <pc:sldMk cId="0" sldId="266"/>
-            <ac:spMk id="9" creationId="{00000000-0000-0000-0000-000000000000}"/>
-          </ac:spMkLst>
-        </pc:spChg>
-        <pc:spChg chg="del mod">
-          <ac:chgData name="kulwinder bhamra" userId="a12914428fb3a095" providerId="LiveId" clId="{F9C495C9-0E7D-43E7-AD41-513FD928BDD5}" dt="2026-05-11T23:19:50.983" v="79" actId="26606"/>
-          <ac:spMkLst>
-            <pc:docMk/>
-            <pc:sldMk cId="0" sldId="266"/>
-            <ac:spMk id="10" creationId="{00000000-0000-0000-0000-000000000000}"/>
-          </ac:spMkLst>
-        </pc:spChg>
-        <pc:spChg chg="del mod">
-          <ac:chgData name="kulwinder bhamra" userId="a12914428fb3a095" providerId="LiveId" clId="{F9C495C9-0E7D-43E7-AD41-513FD928BDD5}" dt="2026-05-11T23:19:50.983" v="79" actId="26606"/>
-          <ac:spMkLst>
-            <pc:docMk/>
-            <pc:sldMk cId="0" sldId="266"/>
-            <ac:spMk id="11" creationId="{00000000-0000-0000-0000-000000000000}"/>
-          </ac:spMkLst>
-        </pc:spChg>
-        <pc:spChg chg="del mod">
-          <ac:chgData name="kulwinder bhamra" userId="a12914428fb3a095" providerId="LiveId" clId="{F9C495C9-0E7D-43E7-AD41-513FD928BDD5}" dt="2026-05-11T23:19:50.983" v="79" actId="26606"/>
-          <ac:spMkLst>
-            <pc:docMk/>
-            <pc:sldMk cId="0" sldId="266"/>
-            <ac:spMk id="14" creationId="{00000000-0000-0000-0000-000000000000}"/>
-          </ac:spMkLst>
-        </pc:spChg>
-        <pc:spChg chg="mod replId">
-          <ac:chgData name="kulwinder bhamra" userId="a12914428fb3a095" providerId="LiveId" clId="{F9C495C9-0E7D-43E7-AD41-513FD928BDD5}" dt="2026-05-11T23:19:50.327" v="78" actId="26606"/>
-          <ac:spMkLst>
-            <pc:docMk/>
-            <pc:sldMk cId="0" sldId="266"/>
-            <ac:spMk id="15" creationId="{00000000-0000-0000-0000-000000000000}"/>
-          </ac:spMkLst>
-        </pc:spChg>
-        <pc:spChg chg="del">
-          <ac:chgData name="kulwinder bhamra" userId="a12914428fb3a095" providerId="LiveId" clId="{F9C495C9-0E7D-43E7-AD41-513FD928BDD5}" dt="2026-05-11T23:04:53.836" v="77" actId="26606"/>
-          <ac:spMkLst>
-            <pc:docMk/>
-            <pc:sldMk cId="0" sldId="266"/>
-            <ac:spMk id="15" creationId="{00000000-0000-0000-0000-000000000000}"/>
-          </ac:spMkLst>
-        </pc:spChg>
       </pc:sldChg>
-      <pc:sldChg chg="addSp delSp modSp add mod modNotes">
-        <pc:chgData name="kulwinder bhamra" userId="a12914428fb3a095" providerId="LiveId" clId="{F9C495C9-0E7D-43E7-AD41-513FD928BDD5}" dt="2026-05-11T23:19:50.983" v="79" actId="26606"/>
-        <pc:sldMkLst>
-          <pc:docMk/>
-          <pc:sldMk cId="0" sldId="267"/>
-        </pc:sldMkLst>
-        <pc:spChg chg="mod">
-          <ac:chgData name="kulwinder bhamra" userId="a12914428fb3a095" providerId="LiveId" clId="{F9C495C9-0E7D-43E7-AD41-513FD928BDD5}" dt="2026-05-11T23:19:50.983" v="79" actId="26606"/>
-          <ac:spMkLst>
-            <pc:docMk/>
-            <pc:sldMk cId="0" sldId="267"/>
-            <ac:spMk id="2" creationId="{00000000-0000-0000-0000-000000000000}"/>
-          </ac:spMkLst>
-        </pc:spChg>
-        <pc:spChg chg="add">
-          <ac:chgData name="kulwinder bhamra" userId="a12914428fb3a095" providerId="LiveId" clId="{F9C495C9-0E7D-43E7-AD41-513FD928BDD5}" dt="2026-05-11T23:19:50.983" v="79" actId="26606"/>
-          <ac:spMkLst>
-            <pc:docMk/>
-            <pc:sldMk cId="0" sldId="267"/>
-            <ac:spMk id="3" creationId="{00000000-0000-0000-0000-000000000000}"/>
-          </ac:spMkLst>
-        </pc:spChg>
-        <pc:spChg chg="mod">
-          <ac:chgData name="kulwinder bhamra" userId="a12914428fb3a095" providerId="LiveId" clId="{F9C495C9-0E7D-43E7-AD41-513FD928BDD5}" dt="2026-05-11T23:19:50.983" v="79" actId="26606"/>
-          <ac:spMkLst>
-            <pc:docMk/>
-            <pc:sldMk cId="0" sldId="267"/>
-            <ac:spMk id="4" creationId="{00000000-0000-0000-0000-000000000000}"/>
-          </ac:spMkLst>
-        </pc:spChg>
-        <pc:spChg chg="add">
-          <ac:chgData name="kulwinder bhamra" userId="a12914428fb3a095" providerId="LiveId" clId="{F9C495C9-0E7D-43E7-AD41-513FD928BDD5}" dt="2026-05-11T23:19:50.983" v="79" actId="26606"/>
-          <ac:spMkLst>
-            <pc:docMk/>
-            <pc:sldMk cId="0" sldId="267"/>
-            <ac:spMk id="5" creationId="{00000000-0000-0000-0000-000000000000}"/>
-          </ac:spMkLst>
-        </pc:spChg>
-        <pc:spChg chg="mod">
-          <ac:chgData name="kulwinder bhamra" userId="a12914428fb3a095" providerId="LiveId" clId="{F9C495C9-0E7D-43E7-AD41-513FD928BDD5}" dt="2026-05-11T23:19:50.983" v="79" actId="26606"/>
-          <ac:spMkLst>
-            <pc:docMk/>
-            <pc:sldMk cId="0" sldId="267"/>
-            <ac:spMk id="6" creationId="{00000000-0000-0000-0000-000000000000}"/>
-          </ac:spMkLst>
-        </pc:spChg>
-        <pc:spChg chg="add">
-          <ac:chgData name="kulwinder bhamra" userId="a12914428fb3a095" providerId="LiveId" clId="{F9C495C9-0E7D-43E7-AD41-513FD928BDD5}" dt="2026-05-11T23:19:50.983" v="79" actId="26606"/>
-          <ac:spMkLst>
-            <pc:docMk/>
-            <pc:sldMk cId="0" sldId="267"/>
-            <ac:spMk id="7" creationId="{00000000-0000-0000-0000-000000000000}"/>
-          </ac:spMkLst>
-        </pc:spChg>
-        <pc:spChg chg="mod">
-          <ac:chgData name="kulwinder bhamra" userId="a12914428fb3a095" providerId="LiveId" clId="{F9C495C9-0E7D-43E7-AD41-513FD928BDD5}" dt="2026-05-11T23:04:53.836" v="77" actId="26606"/>
-          <ac:spMkLst>
-            <pc:docMk/>
-            <pc:sldMk cId="0" sldId="267"/>
-            <ac:spMk id="8" creationId="{00000000-0000-0000-0000-000000000000}"/>
-          </ac:spMkLst>
-        </pc:spChg>
-        <pc:spChg chg="add">
-          <ac:chgData name="kulwinder bhamra" userId="a12914428fb3a095" providerId="LiveId" clId="{F9C495C9-0E7D-43E7-AD41-513FD928BDD5}" dt="2026-05-11T23:19:50.983" v="79" actId="26606"/>
-          <ac:spMkLst>
-            <pc:docMk/>
-            <pc:sldMk cId="0" sldId="267"/>
-            <ac:spMk id="9" creationId="{00000000-0000-0000-0000-000000000000}"/>
-          </ac:spMkLst>
-        </pc:spChg>
-        <pc:spChg chg="mod">
-          <ac:chgData name="kulwinder bhamra" userId="a12914428fb3a095" providerId="LiveId" clId="{F9C495C9-0E7D-43E7-AD41-513FD928BDD5}" dt="2026-05-11T23:19:50.983" v="79" actId="26606"/>
-          <ac:spMkLst>
-            <pc:docMk/>
-            <pc:sldMk cId="0" sldId="267"/>
-            <ac:spMk id="10" creationId="{00000000-0000-0000-0000-000000000000}"/>
-          </ac:spMkLst>
-        </pc:spChg>
-        <pc:spChg chg="mod">
-          <ac:chgData name="kulwinder bhamra" userId="a12914428fb3a095" providerId="LiveId" clId="{F9C495C9-0E7D-43E7-AD41-513FD928BDD5}" dt="2026-05-11T23:04:53.836" v="77" actId="26606"/>
-          <ac:spMkLst>
-            <pc:docMk/>
-            <pc:sldMk cId="0" sldId="267"/>
-            <ac:spMk id="12" creationId="{00000000-0000-0000-0000-000000000000}"/>
-          </ac:spMkLst>
-        </pc:spChg>
-        <pc:spChg chg="del">
-          <ac:chgData name="kulwinder bhamra" userId="a12914428fb3a095" providerId="LiveId" clId="{F9C495C9-0E7D-43E7-AD41-513FD928BDD5}" dt="2026-05-11T23:19:50.983" v="79" actId="26606"/>
-          <ac:spMkLst>
-            <pc:docMk/>
-            <pc:sldMk cId="0" sldId="267"/>
-            <ac:spMk id="13" creationId="{00000000-0000-0000-0000-000000000000}"/>
-          </ac:spMkLst>
-        </pc:spChg>
-        <pc:spChg chg="del mod">
-          <ac:chgData name="kulwinder bhamra" userId="a12914428fb3a095" providerId="LiveId" clId="{F9C495C9-0E7D-43E7-AD41-513FD928BDD5}" dt="2026-05-11T23:19:50.983" v="79" actId="26606"/>
-          <ac:spMkLst>
-            <pc:docMk/>
-            <pc:sldMk cId="0" sldId="267"/>
-            <ac:spMk id="15" creationId="{00000000-0000-0000-0000-000000000000}"/>
-          </ac:spMkLst>
-        </pc:spChg>
-        <pc:spChg chg="mod">
-          <ac:chgData name="kulwinder bhamra" userId="a12914428fb3a095" providerId="LiveId" clId="{F9C495C9-0E7D-43E7-AD41-513FD928BDD5}" dt="2026-05-11T23:04:53.836" v="77" actId="26606"/>
-          <ac:spMkLst>
-            <pc:docMk/>
-            <pc:sldMk cId="0" sldId="267"/>
-            <ac:spMk id="16" creationId="{00000000-0000-0000-0000-000000000000}"/>
-          </ac:spMkLst>
-        </pc:spChg>
-        <pc:picChg chg="mod replId">
-          <ac:chgData name="kulwinder bhamra" userId="a12914428fb3a095" providerId="LiveId" clId="{F9C495C9-0E7D-43E7-AD41-513FD928BDD5}" dt="2026-05-11T23:19:50.327" v="78" actId="26606"/>
-          <ac:picMkLst>
-            <pc:docMk/>
-            <pc:sldMk cId="0" sldId="267"/>
-            <ac:picMk id="17" creationId="{00000000-0000-0000-0000-000000000000}"/>
-          </ac:picMkLst>
-        </pc:picChg>
-        <pc:picChg chg="mod replId">
-          <ac:chgData name="kulwinder bhamra" userId="a12914428fb3a095" providerId="LiveId" clId="{F9C495C9-0E7D-43E7-AD41-513FD928BDD5}" dt="2026-05-11T23:19:50.327" v="78" actId="26606"/>
-          <ac:picMkLst>
-            <pc:docMk/>
-            <pc:sldMk cId="0" sldId="267"/>
-            <ac:picMk id="18" creationId="{00000000-0000-0000-0000-000000000000}"/>
-          </ac:picMkLst>
-        </pc:picChg>
-        <pc:picChg chg="mod replId">
-          <ac:chgData name="kulwinder bhamra" userId="a12914428fb3a095" providerId="LiveId" clId="{F9C495C9-0E7D-43E7-AD41-513FD928BDD5}" dt="2026-05-11T23:19:50.327" v="78" actId="26606"/>
-          <ac:picMkLst>
-            <pc:docMk/>
-            <pc:sldMk cId="0" sldId="267"/>
-            <ac:picMk id="19" creationId="{00000000-0000-0000-0000-000000000000}"/>
-          </ac:picMkLst>
-        </pc:picChg>
-        <pc:picChg chg="mod replId">
-          <ac:chgData name="kulwinder bhamra" userId="a12914428fb3a095" providerId="LiveId" clId="{F9C495C9-0E7D-43E7-AD41-513FD928BDD5}" dt="2026-05-11T23:19:50.327" v="78" actId="26606"/>
-          <ac:picMkLst>
-            <pc:docMk/>
-            <pc:sldMk cId="0" sldId="267"/>
-            <ac:picMk id="20" creationId="{00000000-0000-0000-0000-000000000000}"/>
-          </ac:picMkLst>
-        </pc:picChg>
-      </pc:sldChg>
-      <pc:sldChg chg="add">
-        <pc:chgData name="kulwinder bhamra" userId="a12914428fb3a095" providerId="LiveId" clId="{F9C495C9-0E7D-43E7-AD41-513FD928BDD5}" dt="2026-05-11T23:19:50.983" v="79" actId="26606"/>
-        <pc:sldMkLst>
-          <pc:docMk/>
-          <pc:sldMk cId="0" sldId="268"/>
-        </pc:sldMkLst>
-      </pc:sldChg>
-      <pc:sldChg chg="modSp new del mod replId">
-        <pc:chgData name="kulwinder bhamra" userId="a12914428fb3a095" providerId="LiveId" clId="{F9C495C9-0E7D-43E7-AD41-513FD928BDD5}" dt="2026-05-11T22:53:20.920" v="75" actId="26606"/>
-        <pc:sldMkLst>
-          <pc:docMk/>
-          <pc:sldMk cId="2225185959" sldId="268"/>
-        </pc:sldMkLst>
-        <pc:spChg chg="mod">
-          <ac:chgData name="kulwinder bhamra" userId="a12914428fb3a095" providerId="LiveId" clId="{F9C495C9-0E7D-43E7-AD41-513FD928BDD5}" dt="2026-05-11T22:41:22.665" v="72" actId="255"/>
-          <ac:spMkLst>
-            <pc:docMk/>
-            <pc:sldMk cId="2225185959" sldId="268"/>
-            <ac:spMk id="2" creationId="{555493F2-C023-D4DD-F276-917C8439575E}"/>
-          </ac:spMkLst>
-        </pc:spChg>
-      </pc:sldChg>
-      <pc:sldChg chg="add">
-        <pc:chgData name="kulwinder bhamra" userId="a12914428fb3a095" providerId="LiveId" clId="{F9C495C9-0E7D-43E7-AD41-513FD928BDD5}" dt="2026-05-11T23:19:50.983" v="79" actId="26606"/>
-        <pc:sldMkLst>
-          <pc:docMk/>
-          <pc:sldMk cId="0" sldId="269"/>
-        </pc:sldMkLst>
-      </pc:sldChg>
-      <pc:sldMasterChg chg="add addSldLayout">
-        <pc:chgData name="kulwinder bhamra" userId="a12914428fb3a095" providerId="LiveId" clId="{F9C495C9-0E7D-43E7-AD41-513FD928BDD5}" dt="2026-05-11T22:53:20.920" v="75" actId="26606"/>
-        <pc:sldMasterMkLst>
-          <pc:docMk/>
-          <pc:sldMasterMk cId="0" sldId="2147483648"/>
-        </pc:sldMasterMkLst>
-        <pc:sldLayoutChg chg="add">
-          <pc:chgData name="kulwinder bhamra" userId="a12914428fb3a095" providerId="LiveId" clId="{F9C495C9-0E7D-43E7-AD41-513FD928BDD5}" dt="2026-05-11T22:53:20.920" v="75" actId="26606"/>
-          <pc:sldLayoutMkLst>
-            <pc:docMk/>
-            <pc:sldMasterMk cId="0" sldId="2147483648"/>
-            <pc:sldLayoutMk cId="0" sldId="2147483649"/>
-          </pc:sldLayoutMkLst>
-        </pc:sldLayoutChg>
-      </pc:sldMasterChg>
-      <pc:sldMasterChg chg="del replId delSldLayout modSldLayout">
-        <pc:chgData name="kulwinder bhamra" userId="a12914428fb3a095" providerId="LiveId" clId="{F9C495C9-0E7D-43E7-AD41-513FD928BDD5}" dt="2026-05-11T22:53:20.920" v="75" actId="26606"/>
-        <pc:sldMasterMkLst>
-          <pc:docMk/>
-          <pc:sldMasterMk cId="508276866" sldId="2147483660"/>
-        </pc:sldMasterMkLst>
-        <pc:sldLayoutChg chg="del">
-          <pc:chgData name="kulwinder bhamra" userId="a12914428fb3a095" providerId="LiveId" clId="{F9C495C9-0E7D-43E7-AD41-513FD928BDD5}" dt="2026-05-11T22:53:20.920" v="75" actId="26606"/>
-          <pc:sldLayoutMkLst>
-            <pc:docMk/>
-            <pc:sldMasterMk cId="508276866" sldId="2147483660"/>
-            <pc:sldLayoutMk cId="338956802" sldId="2147483650"/>
-          </pc:sldLayoutMkLst>
-        </pc:sldLayoutChg>
-        <pc:sldLayoutChg chg="del">
-          <pc:chgData name="kulwinder bhamra" userId="a12914428fb3a095" providerId="LiveId" clId="{F9C495C9-0E7D-43E7-AD41-513FD928BDD5}" dt="2026-05-11T22:53:20.920" v="75" actId="26606"/>
-          <pc:sldLayoutMkLst>
-            <pc:docMk/>
-            <pc:sldMasterMk cId="508276866" sldId="2147483660"/>
-            <pc:sldLayoutMk cId="2534499444" sldId="2147483651"/>
-          </pc:sldLayoutMkLst>
-        </pc:sldLayoutChg>
-        <pc:sldLayoutChg chg="del">
-          <pc:chgData name="kulwinder bhamra" userId="a12914428fb3a095" providerId="LiveId" clId="{F9C495C9-0E7D-43E7-AD41-513FD928BDD5}" dt="2026-05-11T22:53:20.920" v="75" actId="26606"/>
-          <pc:sldLayoutMkLst>
-            <pc:docMk/>
-            <pc:sldMasterMk cId="508276866" sldId="2147483660"/>
-            <pc:sldLayoutMk cId="1446170673" sldId="2147483652"/>
-          </pc:sldLayoutMkLst>
-        </pc:sldLayoutChg>
-        <pc:sldLayoutChg chg="del">
-          <pc:chgData name="kulwinder bhamra" userId="a12914428fb3a095" providerId="LiveId" clId="{F9C495C9-0E7D-43E7-AD41-513FD928BDD5}" dt="2026-05-11T22:53:20.920" v="75" actId="26606"/>
-          <pc:sldLayoutMkLst>
-            <pc:docMk/>
-            <pc:sldMasterMk cId="508276866" sldId="2147483660"/>
-            <pc:sldLayoutMk cId="951861047" sldId="2147483653"/>
-          </pc:sldLayoutMkLst>
-        </pc:sldLayoutChg>
-        <pc:sldLayoutChg chg="del">
-          <pc:chgData name="kulwinder bhamra" userId="a12914428fb3a095" providerId="LiveId" clId="{F9C495C9-0E7D-43E7-AD41-513FD928BDD5}" dt="2026-05-11T22:53:20.920" v="75" actId="26606"/>
-          <pc:sldLayoutMkLst>
-            <pc:docMk/>
-            <pc:sldMasterMk cId="508276866" sldId="2147483660"/>
-            <pc:sldLayoutMk cId="1248518413" sldId="2147483654"/>
-          </pc:sldLayoutMkLst>
-        </pc:sldLayoutChg>
-        <pc:sldLayoutChg chg="del">
-          <pc:chgData name="kulwinder bhamra" userId="a12914428fb3a095" providerId="LiveId" clId="{F9C495C9-0E7D-43E7-AD41-513FD928BDD5}" dt="2026-05-11T22:53:20.920" v="75" actId="26606"/>
-          <pc:sldLayoutMkLst>
-            <pc:docMk/>
-            <pc:sldMasterMk cId="508276866" sldId="2147483660"/>
-            <pc:sldLayoutMk cId="148671936" sldId="2147483655"/>
-          </pc:sldLayoutMkLst>
-        </pc:sldLayoutChg>
-        <pc:sldLayoutChg chg="del">
-          <pc:chgData name="kulwinder bhamra" userId="a12914428fb3a095" providerId="LiveId" clId="{F9C495C9-0E7D-43E7-AD41-513FD928BDD5}" dt="2026-05-11T22:53:20.920" v="75" actId="26606"/>
-          <pc:sldLayoutMkLst>
-            <pc:docMk/>
-            <pc:sldMasterMk cId="508276866" sldId="2147483660"/>
-            <pc:sldLayoutMk cId="1166499281" sldId="2147483656"/>
-          </pc:sldLayoutMkLst>
-        </pc:sldLayoutChg>
-        <pc:sldLayoutChg chg="del">
-          <pc:chgData name="kulwinder bhamra" userId="a12914428fb3a095" providerId="LiveId" clId="{F9C495C9-0E7D-43E7-AD41-513FD928BDD5}" dt="2026-05-11T22:53:20.920" v="75" actId="26606"/>
-          <pc:sldLayoutMkLst>
-            <pc:docMk/>
-            <pc:sldMasterMk cId="508276866" sldId="2147483660"/>
-            <pc:sldLayoutMk cId="1449829253" sldId="2147483657"/>
-          </pc:sldLayoutMkLst>
-        </pc:sldLayoutChg>
-        <pc:sldLayoutChg chg="del">
-          <pc:chgData name="kulwinder bhamra" userId="a12914428fb3a095" providerId="LiveId" clId="{F9C495C9-0E7D-43E7-AD41-513FD928BDD5}" dt="2026-05-11T22:53:20.920" v="75" actId="26606"/>
-          <pc:sldLayoutMkLst>
-            <pc:docMk/>
-            <pc:sldMasterMk cId="508276866" sldId="2147483660"/>
-            <pc:sldLayoutMk cId="562047125" sldId="2147483658"/>
-          </pc:sldLayoutMkLst>
-        </pc:sldLayoutChg>
-        <pc:sldLayoutChg chg="del">
-          <pc:chgData name="kulwinder bhamra" userId="a12914428fb3a095" providerId="LiveId" clId="{F9C495C9-0E7D-43E7-AD41-513FD928BDD5}" dt="2026-05-11T22:53:20.920" v="75" actId="26606"/>
-          <pc:sldLayoutMkLst>
-            <pc:docMk/>
-            <pc:sldMasterMk cId="508276866" sldId="2147483660"/>
-            <pc:sldLayoutMk cId="3105792158" sldId="2147483659"/>
-          </pc:sldLayoutMkLst>
-        </pc:sldLayoutChg>
-        <pc:sldLayoutChg chg="del replId">
-          <pc:chgData name="kulwinder bhamra" userId="a12914428fb3a095" providerId="LiveId" clId="{F9C495C9-0E7D-43E7-AD41-513FD928BDD5}" dt="2026-05-11T22:53:20.920" v="75" actId="26606"/>
-          <pc:sldLayoutMkLst>
-            <pc:docMk/>
-            <pc:sldMasterMk cId="508276866" sldId="2147483660"/>
-            <pc:sldLayoutMk cId="3258087014" sldId="2147483661"/>
-          </pc:sldLayoutMkLst>
-        </pc:sldLayoutChg>
-      </pc:sldMasterChg>
     </pc:docChg>
   </pc:docChgLst>
 </pc:chgInfo>
@@ -4633,6 +3278,64 @@
           </a:graphicData>
         </a:graphic>
       </p:graphicFrame>
+      <p:sp>
+        <p:nvSpPr>
+          <p:cNvPr id="5" name="ROC-AUC Callout"/>
+          <p:cNvSpPr/>
+          <p:nvPr/>
+        </p:nvSpPr>
+        <p:spPr>
+          <a:xfrm>
+            <a:off x="6172200" y="1005900"/>
+            <a:ext cx="2360000" cy="880000"/>
+          </a:xfrm>
+          <a:prstGeom prst="rect">
+            <a:avLst/>
+          </a:prstGeom>
+          <a:solidFill>
+            <a:srgbClr val="FFFFFF">
+              <a:alpha val="88000"/>
+            </a:srgbClr>
+          </a:solidFill>
+          <a:ln w="12700">
+            <a:solidFill>
+              <a:srgbClr val="1B2A4A"/>
+            </a:solidFill>
+          </a:ln>
+        </p:spPr>
+        <p:txBody>
+          <a:bodyPr wrap="square" lIns="54864" tIns="27432" rIns="54864" bIns="27432" rtlCol="0" anchor="ctr"/>
+          <a:lstStyle/>
+          <a:p>
+            <a:pPr marL="0" indent="0">
+              <a:buNone/>
+            </a:pPr>
+            <a:r>
+              <a:rPr lang="en-US" sz="1050" b="1">
+                <a:solidFill>
+                  <a:srgbClr val="1B2A4A"/>
+                </a:solidFill>
+                <a:latin typeface="Trebuchet MS" pitchFamily="34" charset="0"/>
+              </a:rPr>
+              <a:t>ROC-AUC Score: 0.671</a:t>
+            </a:r>
+          </a:p>
+          <a:p>
+            <a:pPr marL="0" indent="0">
+              <a:buNone/>
+            </a:pPr>
+            <a:r>
+              <a:rPr lang="en-US" sz="750">
+                <a:solidFill>
+                  <a:srgbClr val="2D3748"/>
+                </a:solidFill>
+                <a:latin typeface="Calibri" pitchFamily="34" charset="0"/>
+              </a:rPr>
+              <a:t>The Random Forest model demonstrated a fair ability to distinguish between customers likely to churn and those likely to remain active.</a:t>
+            </a:r>
+          </a:p>
+        </p:txBody>
+      </p:sp>
     </p:spTree>
   </p:cSld>
   <p:clrMapOvr>
@@ -12043,9 +10746,15 @@
       </p:sp>
       <p:graphicFrame>
         <p:nvGraphicFramePr>
-          <p:cNvPr id="3" name="Chart 0"/>
+          <p:cNvPr id="3" name="Chart 0" descr="Chart"/>
           <p:cNvGraphicFramePr/>
-          <p:nvPr/>
+          <p:nvPr>
+            <p:extLst>
+              <p:ext uri="{D42A27DB-BD31-4B8C-83A1-F6EECF244321}">
+                <p14:modId xmlns:p14="http://schemas.microsoft.com/office/powerpoint/2010/main" val="1783324056"/>
+              </p:ext>
+            </p:extLst>
+          </p:nvPr>
         </p:nvGraphicFramePr>
         <p:xfrm>
           <a:off x="457200" y="1097280"/>
